--- a/decks/build-your-own-donna-v2.pptx
+++ b/decks/build-your-own-donna-v2.pptx
@@ -6616,8 +6616,8 @@
         </p:nvSpPr>
         <p:spPr>
           <a:xfrm>
-            <a:off x="10332720" y="841248"/>
-            <a:ext cx="1645920" cy="164592"/>
+            <a:off x="9189720" y="841248"/>
+            <a:ext cx="2194560" cy="164592"/>
           </a:xfrm>
           <a:prstGeom prst="rect">
             <a:avLst/>
@@ -7155,8 +7155,8 @@
         </p:nvSpPr>
         <p:spPr>
           <a:xfrm>
-            <a:off x="10332720" y="841248"/>
-            <a:ext cx="1645920" cy="164592"/>
+            <a:off x="9189720" y="841248"/>
+            <a:ext cx="2194560" cy="164592"/>
           </a:xfrm>
           <a:prstGeom prst="rect">
             <a:avLst/>
@@ -7276,7 +7276,7 @@
         <p:spPr>
           <a:xfrm>
             <a:off x="813816" y="1775155"/>
-            <a:ext cx="5687568" cy="2196846"/>
+            <a:ext cx="5687568" cy="2039112"/>
           </a:xfrm>
           <a:prstGeom prst="rect">
             <a:avLst/>
@@ -7295,8 +7295,8 @@
         </p:nvSpPr>
         <p:spPr>
           <a:xfrm>
-            <a:off x="1088136" y="2049475"/>
-            <a:ext cx="5138928" cy="299466"/>
+            <a:off x="1051560" y="2012899"/>
+            <a:ext cx="5212080" cy="299466"/>
           </a:xfrm>
           <a:prstGeom prst="rect">
             <a:avLst/>
@@ -7334,7 +7334,7 @@
         </p:nvSpPr>
         <p:spPr>
           <a:xfrm rot="2700000">
-            <a:off x="1088136" y="2536393"/>
+            <a:off x="1051560" y="2499817"/>
             <a:ext cx="100584" cy="100584"/>
           </a:xfrm>
           <a:prstGeom prst="rect">
@@ -7359,8 +7359,8 @@
         </p:nvSpPr>
         <p:spPr>
           <a:xfrm>
-            <a:off x="1399032" y="2458669"/>
-            <a:ext cx="4828032" cy="315468"/>
+            <a:off x="1362456" y="2422093"/>
+            <a:ext cx="4901184" cy="299466"/>
           </a:xfrm>
           <a:prstGeom prst="rect">
             <a:avLst/>
@@ -7379,7 +7379,7 @@
               <a:buNone/>
             </a:pPr>
             <a:r>
-              <a:rPr lang="en-US" sz="1400" dirty="0">
+              <a:rPr lang="en-US" sz="1300" dirty="0">
                 <a:solidFill>
                   <a:srgbClr val="14213D"/>
                 </a:solidFill>
@@ -7389,7 +7389,7 @@
               </a:rPr>
               <a:t>Projects, then New project. Name it Donna.</a:t>
             </a:r>
-            <a:endParaRPr lang="en-US" sz="1400" dirty="0"/>
+            <a:endParaRPr lang="en-US" sz="1300" dirty="0"/>
           </a:p>
         </p:txBody>
       </p:sp>
@@ -7401,7 +7401,7 @@
         </p:nvSpPr>
         <p:spPr>
           <a:xfrm rot="2700000">
-            <a:off x="1088136" y="2998165"/>
+            <a:off x="1051560" y="2927299"/>
             <a:ext cx="100584" cy="100584"/>
           </a:xfrm>
           <a:prstGeom prst="rect">
@@ -7426,8 +7426,8 @@
         </p:nvSpPr>
         <p:spPr>
           <a:xfrm>
-            <a:off x="1399032" y="2920441"/>
-            <a:ext cx="4828032" cy="315468"/>
+            <a:off x="1362456" y="2849575"/>
+            <a:ext cx="4901184" cy="299466"/>
           </a:xfrm>
           <a:prstGeom prst="rect">
             <a:avLst/>
@@ -7446,7 +7446,7 @@
               <a:buNone/>
             </a:pPr>
             <a:r>
-              <a:rPr lang="en-US" sz="1400" dirty="0">
+              <a:rPr lang="en-US" sz="1300" dirty="0">
                 <a:solidFill>
                   <a:srgbClr val="14213D"/>
                 </a:solidFill>
@@ -7456,7 +7456,7 @@
               </a:rPr>
               <a:t>Settings, then Connectors.</a:t>
             </a:r>
-            <a:endParaRPr lang="en-US" sz="1400" dirty="0"/>
+            <a:endParaRPr lang="en-US" sz="1300" dirty="0"/>
           </a:p>
         </p:txBody>
       </p:sp>
@@ -7468,7 +7468,7 @@
         </p:nvSpPr>
         <p:spPr>
           <a:xfrm rot="2700000">
-            <a:off x="1088136" y="3459937"/>
+            <a:off x="1051560" y="3354781"/>
             <a:ext cx="100584" cy="100584"/>
           </a:xfrm>
           <a:prstGeom prst="rect">
@@ -7493,8 +7493,8 @@
         </p:nvSpPr>
         <p:spPr>
           <a:xfrm>
-            <a:off x="1399032" y="3382213"/>
-            <a:ext cx="4828032" cy="315468"/>
+            <a:off x="1362456" y="3277057"/>
+            <a:ext cx="4901184" cy="299466"/>
           </a:xfrm>
           <a:prstGeom prst="rect">
             <a:avLst/>
@@ -7513,7 +7513,7 @@
               <a:buNone/>
             </a:pPr>
             <a:r>
-              <a:rPr lang="en-US" sz="1400" dirty="0">
+              <a:rPr lang="en-US" sz="1300" dirty="0">
                 <a:solidFill>
                   <a:srgbClr val="14213D"/>
                 </a:solidFill>
@@ -7523,7 +7523,7 @@
               </a:rPr>
               <a:t>Connect Gmail, Calendar, and Drive. All three, now.</a:t>
             </a:r>
-            <a:endParaRPr lang="en-US" sz="1400" dirty="0"/>
+            <a:endParaRPr lang="en-US" sz="1300" dirty="0"/>
           </a:p>
         </p:txBody>
       </p:sp>
@@ -7535,8 +7535,8 @@
         </p:nvSpPr>
         <p:spPr>
           <a:xfrm>
-            <a:off x="813816" y="3640531"/>
-            <a:ext cx="5687568" cy="274320"/>
+            <a:off x="813816" y="3942283"/>
+            <a:ext cx="5687568" cy="237744"/>
           </a:xfrm>
           <a:prstGeom prst="rect">
             <a:avLst/>
@@ -7574,8 +7574,8 @@
         </p:nvSpPr>
         <p:spPr>
           <a:xfrm>
-            <a:off x="6903720" y="1775155"/>
-            <a:ext cx="4480560" cy="1239012"/>
+            <a:off x="813816" y="4326331"/>
+            <a:ext cx="5687568" cy="1239012"/>
           </a:xfrm>
           <a:prstGeom prst="rect">
             <a:avLst/>
@@ -7594,8 +7594,8 @@
         </p:nvSpPr>
         <p:spPr>
           <a:xfrm>
-            <a:off x="7159752" y="1948891"/>
-            <a:ext cx="3968496" cy="201168"/>
+            <a:off x="1069848" y="4500067"/>
+            <a:ext cx="5175504" cy="201168"/>
           </a:xfrm>
           <a:prstGeom prst="rect">
             <a:avLst/>
@@ -7619,7 +7619,7 @@
                 <a:ea typeface="Arial" pitchFamily="34" charset="-122"/>
                 <a:cs typeface="Arial" pitchFamily="34" charset="-120"/>
               </a:rPr>
-              <a:t>PROMPT 1 · THE QUESTION</a:t>
+              <a:t>STUCK CONNECTING? PASTE THIS</a:t>
             </a:r>
             <a:endParaRPr lang="en-US" sz="1100" dirty="0"/>
           </a:p>
@@ -7633,8 +7633,8 @@
         </p:nvSpPr>
         <p:spPr>
           <a:xfrm>
-            <a:off x="7159752" y="2232355"/>
-            <a:ext cx="3968496" cy="690372"/>
+            <a:off x="1069848" y="4783531"/>
+            <a:ext cx="5175504" cy="690372"/>
           </a:xfrm>
           <a:prstGeom prst="rect">
             <a:avLst/>
@@ -7661,7 +7661,7 @@
                 <a:ea typeface="Courier New" pitchFamily="34" charset="-122"/>
                 <a:cs typeface="Courier New" pitchFamily="34" charset="-120"/>
               </a:rPr>
-              <a:t>What landed in my inbox in the last 24 hours</a:t>
+              <a:t>Walk me through connecting my work email and calendar</a:t>
             </a:r>
             <a:endParaRPr lang="en-US" sz="1200" dirty="0"/>
           </a:p>
@@ -7681,7 +7681,7 @@
                 <a:ea typeface="Courier New" pitchFamily="34" charset="-122"/>
                 <a:cs typeface="Courier New" pitchFamily="34" charset="-120"/>
               </a:rPr>
-              <a:t>that actually needs ME? Top 5, one line</a:t>
+              <a:t>to Claude, step by step, naming the exact buttons on my</a:t>
             </a:r>
             <a:endParaRPr lang="en-US" sz="1200" dirty="0"/>
           </a:p>
@@ -7701,7 +7701,7 @@
                 <a:ea typeface="Courier New" pitchFamily="34" charset="-122"/>
                 <a:cs typeface="Courier New" pitchFamily="34" charset="-120"/>
               </a:rPr>
-              <a:t>each.</a:t>
+              <a:t>screen.</a:t>
             </a:r>
             <a:endParaRPr lang="en-US" sz="1200" dirty="0"/>
           </a:p>
@@ -7715,7 +7715,7 @@
         </p:nvSpPr>
         <p:spPr>
           <a:xfrm>
-            <a:off x="6903720" y="3233623"/>
+            <a:off x="6903720" y="1775155"/>
             <a:ext cx="4480560" cy="1239012"/>
           </a:xfrm>
           <a:prstGeom prst="rect">
@@ -7735,7 +7735,7 @@
         </p:nvSpPr>
         <p:spPr>
           <a:xfrm>
-            <a:off x="7159752" y="3407359"/>
+            <a:off x="7159752" y="1948891"/>
             <a:ext cx="3968496" cy="201168"/>
           </a:xfrm>
           <a:prstGeom prst="rect">
@@ -7760,7 +7760,7 @@
                 <a:ea typeface="Arial" pitchFamily="34" charset="-122"/>
                 <a:cs typeface="Arial" pitchFamily="34" charset="-120"/>
               </a:rPr>
-              <a:t>PROMPT 2 · THE FIRST DRAFT</a:t>
+              <a:t>PROMPT 1 · THE QUESTION</a:t>
             </a:r>
             <a:endParaRPr lang="en-US" sz="1100" dirty="0"/>
           </a:p>
@@ -7774,7 +7774,7 @@
         </p:nvSpPr>
         <p:spPr>
           <a:xfrm>
-            <a:off x="7159752" y="3690823"/>
+            <a:off x="7159752" y="2232355"/>
             <a:ext cx="3968496" cy="690372"/>
           </a:xfrm>
           <a:prstGeom prst="rect">
@@ -7802,7 +7802,7 @@
                 <a:ea typeface="Courier New" pitchFamily="34" charset="-122"/>
                 <a:cs typeface="Courier New" pitchFamily="34" charset="-120"/>
               </a:rPr>
-              <a:t>Draft a reply to #1. Under 100 words, warm</a:t>
+              <a:t>What landed in my inbox in the last 24</a:t>
             </a:r>
             <a:endParaRPr lang="en-US" sz="1200" dirty="0"/>
           </a:p>
@@ -7822,7 +7822,7 @@
                 <a:ea typeface="Courier New" pitchFamily="34" charset="-122"/>
                 <a:cs typeface="Courier New" pitchFamily="34" charset="-120"/>
               </a:rPr>
-              <a:t>but decisive. Save it as a draft in my email</a:t>
+              <a:t>hours that actually needs ME? Top 5, one</a:t>
             </a:r>
             <a:endParaRPr lang="en-US" sz="1200" dirty="0"/>
           </a:p>
@@ -7842,7 +7842,168 @@
                 <a:ea typeface="Courier New" pitchFamily="34" charset="-122"/>
                 <a:cs typeface="Courier New" pitchFamily="34" charset="-120"/>
               </a:rPr>
-              <a:t>so I can review it there. Do not send it.</a:t>
+              <a:t>line each.</a:t>
+            </a:r>
+            <a:endParaRPr lang="en-US" sz="1200" dirty="0"/>
+          </a:p>
+        </p:txBody>
+      </p:sp>
+      <p:sp>
+        <p:nvSpPr>
+          <p:cNvPr id="32" name="Shape 30"/>
+          <p:cNvSpPr/>
+          <p:nvPr/>
+        </p:nvSpPr>
+        <p:spPr>
+          <a:xfrm>
+            <a:off x="6903720" y="3233623"/>
+            <a:ext cx="4480560" cy="1426464"/>
+          </a:xfrm>
+          <a:prstGeom prst="rect">
+            <a:avLst/>
+          </a:prstGeom>
+          <a:solidFill>
+            <a:srgbClr val="14213D"/>
+          </a:solidFill>
+          <a:ln/>
+        </p:spPr>
+      </p:sp>
+      <p:sp>
+        <p:nvSpPr>
+          <p:cNvPr id="33" name="Text 31"/>
+          <p:cNvSpPr/>
+          <p:nvPr/>
+        </p:nvSpPr>
+        <p:spPr>
+          <a:xfrm>
+            <a:off x="7159752" y="3407359"/>
+            <a:ext cx="3968496" cy="201168"/>
+          </a:xfrm>
+          <a:prstGeom prst="rect">
+            <a:avLst/>
+          </a:prstGeom>
+          <a:noFill/>
+          <a:ln/>
+        </p:spPr>
+        <p:txBody>
+          <a:bodyPr wrap="square" lIns="0" tIns="0" rIns="0" bIns="0" rtlCol="0" anchor="ctr"/>
+          <a:lstStyle/>
+          <a:p>
+            <a:pPr indent="0" marL="0">
+              <a:buNone/>
+            </a:pPr>
+            <a:r>
+              <a:rPr lang="en-US" sz="1100" b="1" spc="160" kern="0" dirty="0">
+                <a:solidFill>
+                  <a:srgbClr val="E7C766"/>
+                </a:solidFill>
+                <a:latin typeface="Arial" pitchFamily="34" charset="0"/>
+                <a:ea typeface="Arial" pitchFamily="34" charset="-122"/>
+                <a:cs typeface="Arial" pitchFamily="34" charset="-120"/>
+              </a:rPr>
+              <a:t>PROMPT 2 · THE FIRST DRAFT</a:t>
+            </a:r>
+            <a:endParaRPr lang="en-US" sz="1100" dirty="0"/>
+          </a:p>
+        </p:txBody>
+      </p:sp>
+      <p:sp>
+        <p:nvSpPr>
+          <p:cNvPr id="34" name="Text 32"/>
+          <p:cNvSpPr/>
+          <p:nvPr/>
+        </p:nvSpPr>
+        <p:spPr>
+          <a:xfrm>
+            <a:off x="7159752" y="3690823"/>
+            <a:ext cx="3968496" cy="877824"/>
+          </a:xfrm>
+          <a:prstGeom prst="rect">
+            <a:avLst/>
+          </a:prstGeom>
+          <a:noFill/>
+          <a:ln/>
+        </p:spPr>
+        <p:txBody>
+          <a:bodyPr wrap="square" lIns="0" tIns="0" rIns="0" bIns="0" rtlCol="0" anchor="t"/>
+          <a:lstStyle/>
+          <a:p>
+            <a:pPr indent="0" marL="0">
+              <a:lnSpc>
+                <a:spcPts val="1480"/>
+              </a:lnSpc>
+              <a:buNone/>
+            </a:pPr>
+            <a:r>
+              <a:rPr lang="en-US" sz="1200" dirty="0">
+                <a:solidFill>
+                  <a:srgbClr val="F7F3EA"/>
+                </a:solidFill>
+                <a:latin typeface="Courier New" pitchFamily="34" charset="0"/>
+                <a:ea typeface="Courier New" pitchFamily="34" charset="-122"/>
+                <a:cs typeface="Courier New" pitchFamily="34" charset="-120"/>
+              </a:rPr>
+              <a:t>Draft a reply to #1. Under 100 words, warm</a:t>
+            </a:r>
+            <a:endParaRPr lang="en-US" sz="1200" dirty="0"/>
+          </a:p>
+          <a:p>
+            <a:pPr indent="0" marL="0">
+              <a:lnSpc>
+                <a:spcPts val="1480"/>
+              </a:lnSpc>
+              <a:buNone/>
+            </a:pPr>
+            <a:r>
+              <a:rPr lang="en-US" sz="1200" dirty="0">
+                <a:solidFill>
+                  <a:srgbClr val="F7F3EA"/>
+                </a:solidFill>
+                <a:latin typeface="Courier New" pitchFamily="34" charset="0"/>
+                <a:ea typeface="Courier New" pitchFamily="34" charset="-122"/>
+                <a:cs typeface="Courier New" pitchFamily="34" charset="-120"/>
+              </a:rPr>
+              <a:t>but decisive. Save it as a draft in my</a:t>
+            </a:r>
+            <a:endParaRPr lang="en-US" sz="1200" dirty="0"/>
+          </a:p>
+          <a:p>
+            <a:pPr indent="0" marL="0">
+              <a:lnSpc>
+                <a:spcPts val="1480"/>
+              </a:lnSpc>
+              <a:buNone/>
+            </a:pPr>
+            <a:r>
+              <a:rPr lang="en-US" sz="1200" dirty="0">
+                <a:solidFill>
+                  <a:srgbClr val="F7F3EA"/>
+                </a:solidFill>
+                <a:latin typeface="Courier New" pitchFamily="34" charset="0"/>
+                <a:ea typeface="Courier New" pitchFamily="34" charset="-122"/>
+                <a:cs typeface="Courier New" pitchFamily="34" charset="-120"/>
+              </a:rPr>
+              <a:t>email so I can review it there. Do not</a:t>
+            </a:r>
+            <a:endParaRPr lang="en-US" sz="1200" dirty="0"/>
+          </a:p>
+          <a:p>
+            <a:pPr indent="0" marL="0">
+              <a:lnSpc>
+                <a:spcPts val="1480"/>
+              </a:lnSpc>
+              <a:buNone/>
+            </a:pPr>
+            <a:r>
+              <a:rPr lang="en-US" sz="1200" dirty="0">
+                <a:solidFill>
+                  <a:srgbClr val="F7F3EA"/>
+                </a:solidFill>
+                <a:latin typeface="Courier New" pitchFamily="34" charset="0"/>
+                <a:ea typeface="Courier New" pitchFamily="34" charset="-122"/>
+                <a:cs typeface="Courier New" pitchFamily="34" charset="-120"/>
+              </a:rPr>
+              <a:t>send it.</a:t>
             </a:r>
             <a:endParaRPr lang="en-US" sz="1200" dirty="0"/>
           </a:p>
@@ -8239,8 +8400,8 @@
         </p:nvSpPr>
         <p:spPr>
           <a:xfrm>
-            <a:off x="10332720" y="841248"/>
-            <a:ext cx="1645920" cy="164592"/>
+            <a:off x="9189720" y="841248"/>
+            <a:ext cx="2194560" cy="164592"/>
           </a:xfrm>
           <a:prstGeom prst="rect">
             <a:avLst/>
@@ -8764,8 +8925,8 @@
         </p:nvSpPr>
         <p:spPr>
           <a:xfrm>
-            <a:off x="10332720" y="841248"/>
-            <a:ext cx="1645920" cy="164592"/>
+            <a:off x="9189720" y="841248"/>
+            <a:ext cx="2194560" cy="164592"/>
           </a:xfrm>
           <a:prstGeom prst="rect">
             <a:avLst/>
@@ -9303,8 +9464,8 @@
         </p:nvSpPr>
         <p:spPr>
           <a:xfrm>
-            <a:off x="10332720" y="841248"/>
-            <a:ext cx="1645920" cy="164592"/>
+            <a:off x="9189720" y="841248"/>
+            <a:ext cx="2194560" cy="164592"/>
           </a:xfrm>
           <a:prstGeom prst="rect">
             <a:avLst/>
@@ -10698,8 +10859,8 @@
         </p:nvSpPr>
         <p:spPr>
           <a:xfrm>
-            <a:off x="10332720" y="841248"/>
-            <a:ext cx="1645920" cy="164592"/>
+            <a:off x="9189720" y="841248"/>
+            <a:ext cx="2194560" cy="164592"/>
           </a:xfrm>
           <a:prstGeom prst="rect">
             <a:avLst/>
@@ -11299,8 +11460,8 @@
         </p:nvSpPr>
         <p:spPr>
           <a:xfrm>
-            <a:off x="10332720" y="841248"/>
-            <a:ext cx="1645920" cy="164592"/>
+            <a:off x="9189720" y="841248"/>
+            <a:ext cx="2194560" cy="164592"/>
           </a:xfrm>
           <a:prstGeom prst="rect">
             <a:avLst/>
@@ -11838,8 +11999,8 @@
         </p:nvSpPr>
         <p:spPr>
           <a:xfrm>
-            <a:off x="10332720" y="841248"/>
-            <a:ext cx="1645920" cy="164592"/>
+            <a:off x="9189720" y="841248"/>
+            <a:ext cx="2194560" cy="164592"/>
           </a:xfrm>
           <a:prstGeom prst="rect">
             <a:avLst/>
@@ -11959,7 +12120,7 @@
         <p:spPr>
           <a:xfrm>
             <a:off x="813816" y="1775155"/>
-            <a:ext cx="6675120" cy="1988820"/>
+            <a:ext cx="6675120" cy="1613916"/>
           </a:xfrm>
           <a:prstGeom prst="rect">
             <a:avLst/>
@@ -12018,7 +12179,7 @@
         <p:spPr>
           <a:xfrm>
             <a:off x="1069848" y="2232355"/>
-            <a:ext cx="6163056" cy="1440180"/>
+            <a:ext cx="6163056" cy="1065276"/>
           </a:xfrm>
           <a:prstGeom prst="rect">
             <a:avLst/>
@@ -12045,7 +12206,7 @@
                 <a:ea typeface="Courier New" pitchFamily="34" charset="-122"/>
                 <a:cs typeface="Courier New" pitchFamily="34" charset="-120"/>
               </a:rPr>
-              <a:t>Turn this project's triage instructions into</a:t>
+              <a:t>Turn this project's triage instructions into a reusable skill file</a:t>
             </a:r>
             <a:endParaRPr lang="en-US" sz="1200" dirty="0"/>
           </a:p>
@@ -12065,7 +12226,7 @@
                 <a:ea typeface="Courier New" pitchFamily="34" charset="-122"/>
                 <a:cs typeface="Courier New" pitchFamily="34" charset="-120"/>
               </a:rPr>
-              <a:t>a reusable skill file called donna-replies.</a:t>
+              <a:t>called donna-replies. Use everything you already know from this</a:t>
             </a:r>
             <a:endParaRPr lang="en-US" sz="1200" dirty="0"/>
           </a:p>
@@ -12085,7 +12246,7 @@
                 <a:ea typeface="Courier New" pitchFamily="34" charset="-122"/>
                 <a:cs typeface="Courier New" pitchFamily="34" charset="-120"/>
               </a:rPr>
-              <a:t>Use everything you already know from this</a:t>
+              <a:t>project: my VIPs, my delegates, my voice, my rules. Include the</a:t>
             </a:r>
             <a:endParaRPr lang="en-US" sz="1200" dirty="0"/>
           </a:p>
@@ -12105,47 +12266,7 @@
                 <a:ea typeface="Courier New" pitchFamily="34" charset="-122"/>
                 <a:cs typeface="Courier New" pitchFamily="34" charset="-120"/>
               </a:rPr>
-              <a:t>project: my VIPs, my delegates, my voice, my</a:t>
-            </a:r>
-            <a:endParaRPr lang="en-US" sz="1200" dirty="0"/>
-          </a:p>
-          <a:p>
-            <a:pPr indent="0" marL="0">
-              <a:lnSpc>
-                <a:spcPts val="1480"/>
-              </a:lnSpc>
-              <a:buNone/>
-            </a:pPr>
-            <a:r>
-              <a:rPr lang="en-US" sz="1200" dirty="0">
-                <a:solidFill>
-                  <a:srgbClr val="F7F3EA"/>
-                </a:solidFill>
-                <a:latin typeface="Courier New" pitchFamily="34" charset="0"/>
-                <a:ea typeface="Courier New" pitchFamily="34" charset="-122"/>
-                <a:cs typeface="Courier New" pitchFamily="34" charset="-120"/>
-              </a:rPr>
-              <a:t>rules. Include the line "Never send. Never</a:t>
-            </a:r>
-            <a:endParaRPr lang="en-US" sz="1200" dirty="0"/>
-          </a:p>
-          <a:p>
-            <a:pPr indent="0" marL="0">
-              <a:lnSpc>
-                <a:spcPts val="1480"/>
-              </a:lnSpc>
-              <a:buNone/>
-            </a:pPr>
-            <a:r>
-              <a:rPr lang="en-US" sz="1200" dirty="0">
-                <a:solidFill>
-                  <a:srgbClr val="F7F3EA"/>
-                </a:solidFill>
-                <a:latin typeface="Courier New" pitchFamily="34" charset="0"/>
-                <a:ea typeface="Courier New" pitchFamily="34" charset="-122"/>
-                <a:cs typeface="Courier New" pitchFamily="34" charset="-120"/>
-              </a:rPr>
-              <a:t>delete. No exceptions." Then give me the</a:t>
+              <a:t>line "Never send. Never delete. No exceptions." Then give me the</a:t>
             </a:r>
             <a:endParaRPr lang="en-US" sz="1200" dirty="0"/>
           </a:p>
@@ -12702,8 +12823,8 @@
         </p:nvSpPr>
         <p:spPr>
           <a:xfrm>
-            <a:off x="10332720" y="841248"/>
-            <a:ext cx="1645920" cy="164592"/>
+            <a:off x="9189720" y="841248"/>
+            <a:ext cx="2194560" cy="164592"/>
           </a:xfrm>
           <a:prstGeom prst="rect">
             <a:avLst/>
@@ -14753,8 +14874,8 @@
         </p:nvSpPr>
         <p:spPr>
           <a:xfrm>
-            <a:off x="10332720" y="841248"/>
-            <a:ext cx="1645920" cy="164592"/>
+            <a:off x="9189720" y="841248"/>
+            <a:ext cx="2194560" cy="164592"/>
           </a:xfrm>
           <a:prstGeom prst="rect">
             <a:avLst/>
@@ -16044,8 +16165,8 @@
         </p:nvSpPr>
         <p:spPr>
           <a:xfrm>
-            <a:off x="10332720" y="841248"/>
-            <a:ext cx="1645920" cy="164592"/>
+            <a:off x="9189720" y="841248"/>
+            <a:ext cx="2194560" cy="164592"/>
           </a:xfrm>
           <a:prstGeom prst="rect">
             <a:avLst/>
@@ -23859,7 +23980,7 @@
         </p:nvSpPr>
         <p:spPr>
           <a:xfrm>
-            <a:off x="813816" y="5596128"/>
+            <a:off x="813816" y="5486400"/>
             <a:ext cx="10570464" cy="164592"/>
           </a:xfrm>
           <a:prstGeom prst="rect">
@@ -26708,7 +26829,7 @@
         </p:nvSpPr>
         <p:spPr>
           <a:xfrm>
-            <a:off x="813816" y="5596128"/>
+            <a:off x="813816" y="5486400"/>
             <a:ext cx="10570464" cy="164592"/>
           </a:xfrm>
           <a:prstGeom prst="rect">

--- a/decks/build-your-own-donna-v2.pptx
+++ b/decks/build-your-own-donna-v2.pptx
@@ -12862,7 +12862,7 @@
         </p:nvSpPr>
         <p:spPr>
           <a:xfrm rot="2700000">
-            <a:off x="6050585" y="1847088"/>
+            <a:off x="6050585" y="2157984"/>
             <a:ext cx="109728" cy="109728"/>
           </a:xfrm>
           <a:prstGeom prst="rect">
@@ -12887,7 +12887,7 @@
         </p:nvSpPr>
         <p:spPr>
           <a:xfrm>
-            <a:off x="1066648" y="2377440"/>
+            <a:off x="1066648" y="2688336"/>
             <a:ext cx="10058400" cy="1107765"/>
           </a:xfrm>
           <a:prstGeom prst="rect">
@@ -12926,7 +12926,7 @@
         </p:nvSpPr>
         <p:spPr>
           <a:xfrm>
-            <a:off x="1737360" y="3796101"/>
+            <a:off x="1737360" y="4106997"/>
             <a:ext cx="8714232" cy="457200"/>
           </a:xfrm>
           <a:prstGeom prst="rect">
@@ -12968,7 +12968,7 @@
         </p:nvSpPr>
         <p:spPr>
           <a:xfrm>
-            <a:off x="1737360" y="4381317"/>
+            <a:off x="1737360" y="4692213"/>
             <a:ext cx="8714232" cy="292608"/>
           </a:xfrm>
           <a:prstGeom prst="rect">
@@ -13789,8 +13789,8 @@
         </p:nvSpPr>
         <p:spPr>
           <a:xfrm>
-            <a:off x="813816" y="4718304"/>
-            <a:ext cx="4480560" cy="219456"/>
+            <a:off x="585216" y="4718304"/>
+            <a:ext cx="4937760" cy="219456"/>
           </a:xfrm>
           <a:prstGeom prst="rect">
             <a:avLst/>
@@ -13806,7 +13806,7 @@
               <a:buNone/>
             </a:pPr>
             <a:r>
-              <a:rPr lang="en-US" sz="900" b="1" spc="80" kern="0" dirty="0">
+              <a:rPr lang="en-US" sz="800" b="1" spc="40" kern="0" dirty="0">
                 <a:solidFill>
                   <a:srgbClr val="5A6379"/>
                 </a:solidFill>
@@ -13814,9 +13814,9 @@
                 <a:ea typeface="Arial" pitchFamily="34" charset="-122"/>
                 <a:cs typeface="Arial" pitchFamily="34" charset="-120"/>
               </a:rPr>
-              <a:t>MORE BOOKINGS  ·  MORE DATA  ·  MORE PERSONAL</a:t>
-            </a:r>
-            <a:endParaRPr lang="en-US" sz="900" dirty="0"/>
+              <a:t>MORE BOOKINGS · MORE DATA · MORE PERSONAL TRIPS</a:t>
+            </a:r>
+            <a:endParaRPr lang="en-US" sz="800" dirty="0"/>
           </a:p>
         </p:txBody>
       </p:sp>
@@ -17916,7 +17916,7 @@
         </p:nvSpPr>
         <p:spPr>
           <a:xfrm>
-            <a:off x="1756258" y="2415235"/>
+            <a:off x="1884274" y="2415235"/>
             <a:ext cx="2010461" cy="2010461"/>
           </a:xfrm>
           <a:prstGeom prst="ellipse">
@@ -17938,7 +17938,7 @@
         </p:nvSpPr>
         <p:spPr>
           <a:xfrm rot="2700000">
-            <a:off x="3412857" y="2650224"/>
+            <a:off x="3540873" y="2650224"/>
             <a:ext cx="118872" cy="118872"/>
           </a:xfrm>
           <a:prstGeom prst="triangle">
@@ -17958,7 +17958,7 @@
         </p:nvSpPr>
         <p:spPr>
           <a:xfrm rot="8100000">
-            <a:off x="3412857" y="4071835"/>
+            <a:off x="3540873" y="4071835"/>
             <a:ext cx="118872" cy="118872"/>
           </a:xfrm>
           <a:prstGeom prst="triangle">
@@ -17978,7 +17978,7 @@
         </p:nvSpPr>
         <p:spPr>
           <a:xfrm rot="13500000">
-            <a:off x="1991247" y="4071835"/>
+            <a:off x="2119263" y="4071835"/>
             <a:ext cx="118872" cy="118872"/>
           </a:xfrm>
           <a:prstGeom prst="triangle">
@@ -17998,7 +17998,7 @@
         </p:nvSpPr>
         <p:spPr>
           <a:xfrm rot="18900000">
-            <a:off x="1991247" y="2650224"/>
+            <a:off x="2119263" y="2650224"/>
             <a:ext cx="118872" cy="118872"/>
           </a:xfrm>
           <a:prstGeom prst="triangle">
@@ -18018,7 +18018,7 @@
         </p:nvSpPr>
         <p:spPr>
           <a:xfrm>
-            <a:off x="2178454" y="2837432"/>
+            <a:off x="2306470" y="2837432"/>
             <a:ext cx="1166067" cy="1166067"/>
           </a:xfrm>
           <a:prstGeom prst="ellipse">
@@ -18038,7 +18038,7 @@
         </p:nvSpPr>
         <p:spPr>
           <a:xfrm>
-            <a:off x="2224174" y="3238856"/>
+            <a:off x="2352190" y="3238856"/>
             <a:ext cx="1074627" cy="363220"/>
           </a:xfrm>
           <a:prstGeom prst="rect">
@@ -18100,7 +18100,7 @@
         </p:nvSpPr>
         <p:spPr>
           <a:xfrm>
-            <a:off x="2542032" y="2195779"/>
+            <a:off x="2670048" y="2195779"/>
             <a:ext cx="438912" cy="438912"/>
           </a:xfrm>
           <a:prstGeom prst="ellipse">
@@ -18125,7 +18125,7 @@
         </p:nvSpPr>
         <p:spPr>
           <a:xfrm>
-            <a:off x="2542032" y="2195779"/>
+            <a:off x="2670048" y="2195779"/>
             <a:ext cx="438912" cy="438912"/>
           </a:xfrm>
           <a:prstGeom prst="rect">
@@ -18164,7 +18164,7 @@
         </p:nvSpPr>
         <p:spPr>
           <a:xfrm>
-            <a:off x="1975104" y="1871167"/>
+            <a:off x="2103120" y="1871167"/>
             <a:ext cx="1572768" cy="251460"/>
           </a:xfrm>
           <a:prstGeom prst="rect">
@@ -18203,7 +18203,7 @@
         </p:nvSpPr>
         <p:spPr>
           <a:xfrm>
-            <a:off x="3547262" y="3201010"/>
+            <a:off x="3675278" y="3201010"/>
             <a:ext cx="438912" cy="438912"/>
           </a:xfrm>
           <a:prstGeom prst="ellipse">
@@ -18228,7 +18228,7 @@
         </p:nvSpPr>
         <p:spPr>
           <a:xfrm>
-            <a:off x="3547262" y="3201010"/>
+            <a:off x="3675278" y="3201010"/>
             <a:ext cx="438912" cy="438912"/>
           </a:xfrm>
           <a:prstGeom prst="rect">
@@ -18267,7 +18267,7 @@
         </p:nvSpPr>
         <p:spPr>
           <a:xfrm>
-            <a:off x="4114190" y="3294736"/>
+            <a:off x="4242206" y="3294736"/>
             <a:ext cx="640080" cy="251460"/>
           </a:xfrm>
           <a:prstGeom prst="rect">
@@ -18306,7 +18306,7 @@
         </p:nvSpPr>
         <p:spPr>
           <a:xfrm>
-            <a:off x="2542032" y="4206240"/>
+            <a:off x="2670048" y="4206240"/>
             <a:ext cx="438912" cy="438912"/>
           </a:xfrm>
           <a:prstGeom prst="ellipse">
@@ -18331,7 +18331,7 @@
         </p:nvSpPr>
         <p:spPr>
           <a:xfrm>
-            <a:off x="2542032" y="4206240"/>
+            <a:off x="2670048" y="4206240"/>
             <a:ext cx="438912" cy="438912"/>
           </a:xfrm>
           <a:prstGeom prst="rect">
@@ -18370,7 +18370,7 @@
         </p:nvSpPr>
         <p:spPr>
           <a:xfrm>
-            <a:off x="1975104" y="4718304"/>
+            <a:off x="2103120" y="4718304"/>
             <a:ext cx="1572768" cy="251460"/>
           </a:xfrm>
           <a:prstGeom prst="rect">
@@ -18409,7 +18409,7 @@
         </p:nvSpPr>
         <p:spPr>
           <a:xfrm>
-            <a:off x="1536802" y="3201010"/>
+            <a:off x="1664818" y="3201010"/>
             <a:ext cx="438912" cy="438912"/>
           </a:xfrm>
           <a:prstGeom prst="ellipse">
@@ -18434,7 +18434,7 @@
         </p:nvSpPr>
         <p:spPr>
           <a:xfrm>
-            <a:off x="1536802" y="3201010"/>
+            <a:off x="1664818" y="3201010"/>
             <a:ext cx="438912" cy="438912"/>
           </a:xfrm>
           <a:prstGeom prst="rect">
@@ -18473,7 +18473,7 @@
         </p:nvSpPr>
         <p:spPr>
           <a:xfrm>
-            <a:off x="552298" y="3294736"/>
+            <a:off x="680314" y="3294736"/>
             <a:ext cx="856488" cy="251460"/>
           </a:xfrm>
           <a:prstGeom prst="rect">
@@ -19252,8 +19252,8 @@
         </p:nvSpPr>
         <p:spPr>
           <a:xfrm>
-            <a:off x="813816" y="1811731"/>
-            <a:ext cx="5102352" cy="1444752"/>
+            <a:off x="813816" y="1793443"/>
+            <a:ext cx="5102352" cy="1371600"/>
           </a:xfrm>
           <a:prstGeom prst="rect">
             <a:avLst/>
@@ -19272,7 +19272,7 @@
         </p:nvSpPr>
         <p:spPr>
           <a:xfrm>
-            <a:off x="1069848" y="1994611"/>
+            <a:off x="1069848" y="1976323"/>
             <a:ext cx="4590288" cy="237744"/>
           </a:xfrm>
           <a:prstGeom prst="rect">
@@ -19325,7 +19325,7 @@
         </p:nvSpPr>
         <p:spPr>
           <a:xfrm>
-            <a:off x="1069848" y="2268931"/>
+            <a:off x="1069848" y="2250643"/>
             <a:ext cx="4590288" cy="256032"/>
           </a:xfrm>
           <a:prstGeom prst="rect">
@@ -19364,7 +19364,7 @@
         </p:nvSpPr>
         <p:spPr>
           <a:xfrm>
-            <a:off x="1069848" y="2561539"/>
+            <a:off x="1069848" y="2543251"/>
             <a:ext cx="4590288" cy="475488"/>
           </a:xfrm>
           <a:prstGeom prst="rect">
@@ -19406,8 +19406,8 @@
         </p:nvSpPr>
         <p:spPr>
           <a:xfrm>
-            <a:off x="6281928" y="1811731"/>
-            <a:ext cx="5102352" cy="1444752"/>
+            <a:off x="6281928" y="1793443"/>
+            <a:ext cx="5102352" cy="1371600"/>
           </a:xfrm>
           <a:prstGeom prst="rect">
             <a:avLst/>
@@ -19426,7 +19426,7 @@
         </p:nvSpPr>
         <p:spPr>
           <a:xfrm>
-            <a:off x="6537960" y="1994611"/>
+            <a:off x="6537960" y="1976323"/>
             <a:ext cx="4590288" cy="237744"/>
           </a:xfrm>
           <a:prstGeom prst="rect">
@@ -19479,7 +19479,7 @@
         </p:nvSpPr>
         <p:spPr>
           <a:xfrm>
-            <a:off x="6537960" y="2268931"/>
+            <a:off x="6537960" y="2250643"/>
             <a:ext cx="4590288" cy="256032"/>
           </a:xfrm>
           <a:prstGeom prst="rect">
@@ -19518,7 +19518,7 @@
         </p:nvSpPr>
         <p:spPr>
           <a:xfrm>
-            <a:off x="6537960" y="2561539"/>
+            <a:off x="6537960" y="2543251"/>
             <a:ext cx="4590288" cy="475488"/>
           </a:xfrm>
           <a:prstGeom prst="rect">
@@ -19560,8 +19560,8 @@
         </p:nvSpPr>
         <p:spPr>
           <a:xfrm>
-            <a:off x="813816" y="3475939"/>
-            <a:ext cx="5102352" cy="1444752"/>
+            <a:off x="813816" y="3366211"/>
+            <a:ext cx="5102352" cy="1371600"/>
           </a:xfrm>
           <a:prstGeom prst="rect">
             <a:avLst/>
@@ -19580,7 +19580,7 @@
         </p:nvSpPr>
         <p:spPr>
           <a:xfrm>
-            <a:off x="1069848" y="3658819"/>
+            <a:off x="1069848" y="3549091"/>
             <a:ext cx="4590288" cy="237744"/>
           </a:xfrm>
           <a:prstGeom prst="rect">
@@ -19633,7 +19633,7 @@
         </p:nvSpPr>
         <p:spPr>
           <a:xfrm>
-            <a:off x="1069848" y="3933139"/>
+            <a:off x="1069848" y="3823411"/>
             <a:ext cx="4590288" cy="256032"/>
           </a:xfrm>
           <a:prstGeom prst="rect">
@@ -19672,7 +19672,7 @@
         </p:nvSpPr>
         <p:spPr>
           <a:xfrm>
-            <a:off x="1069848" y="4225747"/>
+            <a:off x="1069848" y="4116019"/>
             <a:ext cx="4590288" cy="667512"/>
           </a:xfrm>
           <a:prstGeom prst="rect">
@@ -19714,8 +19714,8 @@
         </p:nvSpPr>
         <p:spPr>
           <a:xfrm>
-            <a:off x="6281928" y="3475939"/>
-            <a:ext cx="5102352" cy="1444752"/>
+            <a:off x="6281928" y="3366211"/>
+            <a:ext cx="5102352" cy="1371600"/>
           </a:xfrm>
           <a:prstGeom prst="rect">
             <a:avLst/>
@@ -19734,7 +19734,7 @@
         </p:nvSpPr>
         <p:spPr>
           <a:xfrm>
-            <a:off x="6537960" y="3658819"/>
+            <a:off x="6537960" y="3549091"/>
             <a:ext cx="4590288" cy="237744"/>
           </a:xfrm>
           <a:prstGeom prst="rect">
@@ -19787,7 +19787,7 @@
         </p:nvSpPr>
         <p:spPr>
           <a:xfrm>
-            <a:off x="6537960" y="3933139"/>
+            <a:off x="6537960" y="3823411"/>
             <a:ext cx="4590288" cy="256032"/>
           </a:xfrm>
           <a:prstGeom prst="rect">
@@ -19826,7 +19826,7 @@
         </p:nvSpPr>
         <p:spPr>
           <a:xfrm>
-            <a:off x="6537960" y="4225747"/>
+            <a:off x="6537960" y="4116019"/>
             <a:ext cx="4590288" cy="667512"/>
           </a:xfrm>
           <a:prstGeom prst="rect">
@@ -19905,7 +19905,7 @@
               <a:buNone/>
             </a:pPr>
             <a:r>
-              <a:rPr lang="en-US" sz="1300" b="1" spc="120" kern="0" dirty="0">
+              <a:rPr lang="en-US" sz="1200" b="1" spc="100" kern="0" dirty="0">
                 <a:solidFill>
                   <a:srgbClr val="E7C766"/>
                 </a:solidFill>
@@ -19919,7 +19919,7 @@
               <a:buNone/>
             </a:pPr>
             <a:r>
-              <a:rPr lang="en-US" sz="1300" dirty="0">
+              <a:rPr lang="en-US" sz="1200" dirty="0">
                 <a:solidFill>
                   <a:srgbClr val="F7F3EA"/>
                 </a:solidFill>
@@ -19929,7 +19929,7 @@
               </a:rPr>
               <a:t>each of these four creates tension for the other three. That tension is your requirement set, your governance, and your strategic direction. You need all four in the room.</a:t>
             </a:r>
-            <a:endParaRPr lang="en-US" sz="1300" dirty="0"/>
+            <a:endParaRPr lang="en-US" sz="1200" dirty="0"/>
           </a:p>
         </p:txBody>
       </p:sp>
@@ -23071,7 +23071,7 @@
             <a:avLst/>
           </a:prstGeom>
           <a:solidFill>
-            <a:srgbClr val="2A3244"/>
+            <a:srgbClr val="F7F3EA"/>
           </a:solidFill>
           <a:ln/>
         </p:spPr>
@@ -23106,7 +23106,7 @@
             <a:r>
               <a:rPr lang="en-US" sz="1000" b="1" dirty="0">
                 <a:solidFill>
-                  <a:srgbClr val="E7C766"/>
+                  <a:srgbClr val="14213D"/>
                 </a:solidFill>
                 <a:latin typeface="Georgia" pitchFamily="34" charset="0"/>
                 <a:ea typeface="Georgia" pitchFamily="34" charset="-122"/>
@@ -23126,7 +23126,7 @@
             <a:r>
               <a:rPr lang="en-US" sz="1000" b="1" dirty="0">
                 <a:solidFill>
-                  <a:srgbClr val="E7C766"/>
+                  <a:srgbClr val="14213D"/>
                 </a:solidFill>
                 <a:latin typeface="Georgia" pitchFamily="34" charset="0"/>
                 <a:ea typeface="Georgia" pitchFamily="34" charset="-122"/>
@@ -26155,8 +26155,8 @@
         </p:nvSpPr>
         <p:spPr>
           <a:xfrm>
-            <a:off x="6099048" y="1810512"/>
-            <a:ext cx="0" cy="3364992"/>
+            <a:off x="6099048" y="1883664"/>
+            <a:ext cx="0" cy="3255264"/>
           </a:xfrm>
           <a:prstGeom prst="line">
             <a:avLst/>
@@ -27210,8 +27210,8 @@
         </p:nvSpPr>
         <p:spPr>
           <a:xfrm>
-            <a:off x="6099048" y="1810512"/>
-            <a:ext cx="0" cy="3364992"/>
+            <a:off x="6099048" y="1883664"/>
+            <a:ext cx="0" cy="3255264"/>
           </a:xfrm>
           <a:prstGeom prst="line">
             <a:avLst/>
@@ -27342,7 +27342,7 @@
         </p:nvSpPr>
         <p:spPr>
           <a:xfrm>
-            <a:off x="813816" y="3218688"/>
+            <a:off x="813816" y="3392424"/>
             <a:ext cx="1426464" cy="201168"/>
           </a:xfrm>
           <a:prstGeom prst="rect">
@@ -27381,7 +27381,7 @@
         </p:nvSpPr>
         <p:spPr>
           <a:xfrm>
-            <a:off x="9957816" y="3218688"/>
+            <a:off x="9957816" y="3392424"/>
             <a:ext cx="1426464" cy="201168"/>
           </a:xfrm>
           <a:prstGeom prst="rect">

--- a/decks/build-your-own-donna-v2.pptx
+++ b/decks/build-your-own-donna-v2.pptx
@@ -6488,7 +6488,46 @@
       </p:sp>
       <p:sp>
         <p:nvSpPr>
-          <p:cNvPr id="8" name="Shape 6"/>
+          <p:cNvPr id="8" name="Text 6"/>
+          <p:cNvSpPr/>
+          <p:nvPr/>
+        </p:nvSpPr>
+        <p:spPr>
+          <a:xfrm>
+            <a:off x="10652760" y="5943600"/>
+            <a:ext cx="731520" cy="182880"/>
+          </a:xfrm>
+          <a:prstGeom prst="rect">
+            <a:avLst/>
+          </a:prstGeom>
+          <a:noFill/>
+          <a:ln/>
+        </p:spPr>
+        <p:txBody>
+          <a:bodyPr wrap="square" lIns="0" tIns="0" rIns="0" bIns="0" rtlCol="0" anchor="ctr"/>
+          <a:lstStyle/>
+          <a:p>
+            <a:pPr algn="r" indent="0" marL="0">
+              <a:buNone/>
+            </a:pPr>
+            <a:r>
+              <a:rPr lang="en-US" sz="900" spc="120" kern="0" dirty="0">
+                <a:solidFill>
+                  <a:srgbClr val="AFA893"/>
+                </a:solidFill>
+                <a:latin typeface="Arial" pitchFamily="34" charset="0"/>
+                <a:ea typeface="Arial" pitchFamily="34" charset="-122"/>
+                <a:cs typeface="Arial" pitchFamily="34" charset="-120"/>
+              </a:rPr>
+              <a:t>11</a:t>
+            </a:r>
+            <a:endParaRPr lang="en-US" sz="900" dirty="0"/>
+          </a:p>
+        </p:txBody>
+      </p:sp>
+      <p:sp>
+        <p:nvSpPr>
+          <p:cNvPr id="9" name="Shape 7"/>
           <p:cNvSpPr/>
           <p:nvPr/>
         </p:nvSpPr>
@@ -6510,7 +6549,7 @@
       </p:sp>
       <p:sp>
         <p:nvSpPr>
-          <p:cNvPr id="9" name="Shape 7"/>
+          <p:cNvPr id="10" name="Shape 8"/>
           <p:cNvSpPr/>
           <p:nvPr/>
         </p:nvSpPr>
@@ -6535,7 +6574,7 @@
       </p:sp>
       <p:sp>
         <p:nvSpPr>
-          <p:cNvPr id="10" name="Shape 8"/>
+          <p:cNvPr id="11" name="Shape 9"/>
           <p:cNvSpPr/>
           <p:nvPr/>
         </p:nvSpPr>
@@ -6560,7 +6599,7 @@
       </p:sp>
       <p:sp>
         <p:nvSpPr>
-          <p:cNvPr id="11" name="Shape 9"/>
+          <p:cNvPr id="12" name="Shape 10"/>
           <p:cNvSpPr/>
           <p:nvPr/>
         </p:nvSpPr>
@@ -6585,7 +6624,7 @@
       </p:sp>
       <p:sp>
         <p:nvSpPr>
-          <p:cNvPr id="12" name="Shape 10"/>
+          <p:cNvPr id="13" name="Shape 11"/>
           <p:cNvSpPr/>
           <p:nvPr/>
         </p:nvSpPr>
@@ -6610,7 +6649,7 @@
       </p:sp>
       <p:sp>
         <p:nvSpPr>
-          <p:cNvPr id="13" name="Text 11"/>
+          <p:cNvPr id="14" name="Text 12"/>
           <p:cNvSpPr/>
           <p:nvPr/>
         </p:nvSpPr>
@@ -6649,7 +6688,7 @@
       </p:sp>
       <p:sp>
         <p:nvSpPr>
-          <p:cNvPr id="14" name="Text 12"/>
+          <p:cNvPr id="15" name="Text 13"/>
           <p:cNvSpPr/>
           <p:nvPr/>
         </p:nvSpPr>
@@ -6688,7 +6727,7 @@
       </p:sp>
       <p:sp>
         <p:nvSpPr>
-          <p:cNvPr id="15" name="Text 13"/>
+          <p:cNvPr id="16" name="Text 14"/>
           <p:cNvSpPr/>
           <p:nvPr/>
         </p:nvSpPr>
@@ -6727,7 +6766,7 @@
       </p:sp>
       <p:sp>
         <p:nvSpPr>
-          <p:cNvPr id="16" name="Text 14"/>
+          <p:cNvPr id="17" name="Text 15"/>
           <p:cNvSpPr/>
           <p:nvPr/>
         </p:nvSpPr>
@@ -8797,7 +8836,46 @@
       </p:sp>
       <p:sp>
         <p:nvSpPr>
-          <p:cNvPr id="8" name="Shape 6"/>
+          <p:cNvPr id="8" name="Text 6"/>
+          <p:cNvSpPr/>
+          <p:nvPr/>
+        </p:nvSpPr>
+        <p:spPr>
+          <a:xfrm>
+            <a:off x="10652760" y="5943600"/>
+            <a:ext cx="731520" cy="182880"/>
+          </a:xfrm>
+          <a:prstGeom prst="rect">
+            <a:avLst/>
+          </a:prstGeom>
+          <a:noFill/>
+          <a:ln/>
+        </p:spPr>
+        <p:txBody>
+          <a:bodyPr wrap="square" lIns="0" tIns="0" rIns="0" bIns="0" rtlCol="0" anchor="ctr"/>
+          <a:lstStyle/>
+          <a:p>
+            <a:pPr algn="r" indent="0" marL="0">
+              <a:buNone/>
+            </a:pPr>
+            <a:r>
+              <a:rPr lang="en-US" sz="900" spc="120" kern="0" dirty="0">
+                <a:solidFill>
+                  <a:srgbClr val="AFA893"/>
+                </a:solidFill>
+                <a:latin typeface="Arial" pitchFamily="34" charset="0"/>
+                <a:ea typeface="Arial" pitchFamily="34" charset="-122"/>
+                <a:cs typeface="Arial" pitchFamily="34" charset="-120"/>
+              </a:rPr>
+              <a:t>14</a:t>
+            </a:r>
+            <a:endParaRPr lang="en-US" sz="900" dirty="0"/>
+          </a:p>
+        </p:txBody>
+      </p:sp>
+      <p:sp>
+        <p:nvSpPr>
+          <p:cNvPr id="9" name="Shape 7"/>
           <p:cNvSpPr/>
           <p:nvPr/>
         </p:nvSpPr>
@@ -8819,7 +8897,7 @@
       </p:sp>
       <p:sp>
         <p:nvSpPr>
-          <p:cNvPr id="9" name="Shape 7"/>
+          <p:cNvPr id="10" name="Shape 8"/>
           <p:cNvSpPr/>
           <p:nvPr/>
         </p:nvSpPr>
@@ -8844,7 +8922,7 @@
       </p:sp>
       <p:sp>
         <p:nvSpPr>
-          <p:cNvPr id="10" name="Shape 8"/>
+          <p:cNvPr id="11" name="Shape 9"/>
           <p:cNvSpPr/>
           <p:nvPr/>
         </p:nvSpPr>
@@ -8869,7 +8947,7 @@
       </p:sp>
       <p:sp>
         <p:nvSpPr>
-          <p:cNvPr id="11" name="Shape 9"/>
+          <p:cNvPr id="12" name="Shape 10"/>
           <p:cNvSpPr/>
           <p:nvPr/>
         </p:nvSpPr>
@@ -8894,7 +8972,7 @@
       </p:sp>
       <p:sp>
         <p:nvSpPr>
-          <p:cNvPr id="12" name="Shape 10"/>
+          <p:cNvPr id="13" name="Shape 11"/>
           <p:cNvSpPr/>
           <p:nvPr/>
         </p:nvSpPr>
@@ -8919,7 +8997,7 @@
       </p:sp>
       <p:sp>
         <p:nvSpPr>
-          <p:cNvPr id="13" name="Text 11"/>
+          <p:cNvPr id="14" name="Text 12"/>
           <p:cNvSpPr/>
           <p:nvPr/>
         </p:nvSpPr>
@@ -8958,7 +9036,7 @@
       </p:sp>
       <p:sp>
         <p:nvSpPr>
-          <p:cNvPr id="14" name="Text 12"/>
+          <p:cNvPr id="15" name="Text 13"/>
           <p:cNvSpPr/>
           <p:nvPr/>
         </p:nvSpPr>
@@ -8997,7 +9075,7 @@
       </p:sp>
       <p:sp>
         <p:nvSpPr>
-          <p:cNvPr id="15" name="Text 13"/>
+          <p:cNvPr id="16" name="Text 14"/>
           <p:cNvSpPr/>
           <p:nvPr/>
         </p:nvSpPr>
@@ -9036,7 +9114,7 @@
       </p:sp>
       <p:sp>
         <p:nvSpPr>
-          <p:cNvPr id="16" name="Text 14"/>
+          <p:cNvPr id="17" name="Text 15"/>
           <p:cNvSpPr/>
           <p:nvPr/>
         </p:nvSpPr>
@@ -11332,7 +11410,46 @@
       </p:sp>
       <p:sp>
         <p:nvSpPr>
-          <p:cNvPr id="8" name="Shape 6"/>
+          <p:cNvPr id="8" name="Text 6"/>
+          <p:cNvSpPr/>
+          <p:nvPr/>
+        </p:nvSpPr>
+        <p:spPr>
+          <a:xfrm>
+            <a:off x="10652760" y="5943600"/>
+            <a:ext cx="731520" cy="182880"/>
+          </a:xfrm>
+          <a:prstGeom prst="rect">
+            <a:avLst/>
+          </a:prstGeom>
+          <a:noFill/>
+          <a:ln/>
+        </p:spPr>
+        <p:txBody>
+          <a:bodyPr wrap="square" lIns="0" tIns="0" rIns="0" bIns="0" rtlCol="0" anchor="ctr"/>
+          <a:lstStyle/>
+          <a:p>
+            <a:pPr algn="r" indent="0" marL="0">
+              <a:buNone/>
+            </a:pPr>
+            <a:r>
+              <a:rPr lang="en-US" sz="900" spc="120" kern="0" dirty="0">
+                <a:solidFill>
+                  <a:srgbClr val="AFA893"/>
+                </a:solidFill>
+                <a:latin typeface="Arial" pitchFamily="34" charset="0"/>
+                <a:ea typeface="Arial" pitchFamily="34" charset="-122"/>
+                <a:cs typeface="Arial" pitchFamily="34" charset="-120"/>
+              </a:rPr>
+              <a:t>17</a:t>
+            </a:r>
+            <a:endParaRPr lang="en-US" sz="900" dirty="0"/>
+          </a:p>
+        </p:txBody>
+      </p:sp>
+      <p:sp>
+        <p:nvSpPr>
+          <p:cNvPr id="9" name="Shape 7"/>
           <p:cNvSpPr/>
           <p:nvPr/>
         </p:nvSpPr>
@@ -11354,7 +11471,7 @@
       </p:sp>
       <p:sp>
         <p:nvSpPr>
-          <p:cNvPr id="9" name="Shape 7"/>
+          <p:cNvPr id="10" name="Shape 8"/>
           <p:cNvSpPr/>
           <p:nvPr/>
         </p:nvSpPr>
@@ -11379,7 +11496,7 @@
       </p:sp>
       <p:sp>
         <p:nvSpPr>
-          <p:cNvPr id="10" name="Shape 8"/>
+          <p:cNvPr id="11" name="Shape 9"/>
           <p:cNvSpPr/>
           <p:nvPr/>
         </p:nvSpPr>
@@ -11404,7 +11521,7 @@
       </p:sp>
       <p:sp>
         <p:nvSpPr>
-          <p:cNvPr id="11" name="Shape 9"/>
+          <p:cNvPr id="12" name="Shape 10"/>
           <p:cNvSpPr/>
           <p:nvPr/>
         </p:nvSpPr>
@@ -11429,7 +11546,7 @@
       </p:sp>
       <p:sp>
         <p:nvSpPr>
-          <p:cNvPr id="12" name="Shape 10"/>
+          <p:cNvPr id="13" name="Shape 11"/>
           <p:cNvSpPr/>
           <p:nvPr/>
         </p:nvSpPr>
@@ -11454,7 +11571,7 @@
       </p:sp>
       <p:sp>
         <p:nvSpPr>
-          <p:cNvPr id="13" name="Text 11"/>
+          <p:cNvPr id="14" name="Text 12"/>
           <p:cNvSpPr/>
           <p:nvPr/>
         </p:nvSpPr>
@@ -11493,7 +11610,7 @@
       </p:sp>
       <p:sp>
         <p:nvSpPr>
-          <p:cNvPr id="14" name="Text 12"/>
+          <p:cNvPr id="15" name="Text 13"/>
           <p:cNvSpPr/>
           <p:nvPr/>
         </p:nvSpPr>
@@ -11532,7 +11649,7 @@
       </p:sp>
       <p:sp>
         <p:nvSpPr>
-          <p:cNvPr id="15" name="Text 13"/>
+          <p:cNvPr id="16" name="Text 14"/>
           <p:cNvSpPr/>
           <p:nvPr/>
         </p:nvSpPr>
@@ -11571,7 +11688,7 @@
       </p:sp>
       <p:sp>
         <p:nvSpPr>
-          <p:cNvPr id="16" name="Text 14"/>
+          <p:cNvPr id="17" name="Text 15"/>
           <p:cNvSpPr/>
           <p:nvPr/>
         </p:nvSpPr>
@@ -13806,7 +13923,7 @@
               <a:buNone/>
             </a:pPr>
             <a:r>
-              <a:rPr lang="en-US" sz="800" b="1" spc="40" kern="0" dirty="0">
+              <a:rPr lang="en-US" sz="900" b="1" spc="60" kern="0" dirty="0">
                 <a:solidFill>
                   <a:srgbClr val="5A6379"/>
                 </a:solidFill>
@@ -13814,9 +13931,9 @@
                 <a:ea typeface="Arial" pitchFamily="34" charset="-122"/>
                 <a:cs typeface="Arial" pitchFamily="34" charset="-120"/>
               </a:rPr>
-              <a:t>MORE BOOKINGS · MORE DATA · MORE PERSONAL TRIPS</a:t>
-            </a:r>
-            <a:endParaRPr lang="en-US" sz="800" dirty="0"/>
+              <a:t>BOOKINGS · DATA · PERSONAL TRIPS · BOOKINGS</a:t>
+            </a:r>
+            <a:endParaRPr lang="en-US" sz="900" dirty="0"/>
           </a:p>
         </p:txBody>
       </p:sp>
@@ -13828,8 +13945,8 @@
         </p:nvSpPr>
         <p:spPr>
           <a:xfrm>
-            <a:off x="6903720" y="4718304"/>
-            <a:ext cx="4480560" cy="219456"/>
+            <a:off x="6675120" y="4718304"/>
+            <a:ext cx="4937760" cy="219456"/>
           </a:xfrm>
           <a:prstGeom prst="rect">
             <a:avLst/>
@@ -13845,15 +13962,15 @@
               <a:buNone/>
             </a:pPr>
             <a:r>
-              <a:rPr lang="en-US" sz="900" b="1" spc="80" kern="0" dirty="0">
-                <a:solidFill>
-                  <a:srgbClr val="8A6D14"/>
-                </a:solidFill>
-                <a:latin typeface="Arial" pitchFamily="34" charset="0"/>
-                <a:ea typeface="Arial" pitchFamily="34" charset="-122"/>
-                <a:cs typeface="Arial" pitchFamily="34" charset="-120"/>
-              </a:rPr>
-              <a:t>DOCUMENT  ·  TEST  ·  REVISE  ·  OPERATE</a:t>
+              <a:rPr lang="en-US" sz="900" b="1" spc="60" kern="0" dirty="0">
+                <a:solidFill>
+                  <a:srgbClr val="5A6379"/>
+                </a:solidFill>
+                <a:latin typeface="Arial" pitchFamily="34" charset="0"/>
+                <a:ea typeface="Arial" pitchFamily="34" charset="-122"/>
+                <a:cs typeface="Arial" pitchFamily="34" charset="-120"/>
+              </a:rPr>
+              <a:t>DOCUMENT · TEST · REVISE · OPERATE</a:t>
             </a:r>
             <a:endParaRPr lang="en-US" sz="900" dirty="0"/>
           </a:p>
@@ -13886,7 +14003,7 @@
             <a:r>
               <a:rPr lang="en-US" sz="1200" b="1" spc="160" kern="0" dirty="0">
                 <a:solidFill>
-                  <a:srgbClr val="5A6379"/>
+                  <a:srgbClr val="8A6D14"/>
                 </a:solidFill>
                 <a:latin typeface="Arial" pitchFamily="34" charset="0"/>
                 <a:ea typeface="Arial" pitchFamily="34" charset="-122"/>
@@ -19973,8 +20090,8 @@
         </p:nvSpPr>
         <p:spPr>
           <a:xfrm>
-            <a:off x="5501945" y="795528"/>
-            <a:ext cx="1188720" cy="1188720"/>
+            <a:off x="5392217" y="722376"/>
+            <a:ext cx="1408176" cy="1408176"/>
           </a:xfrm>
           <a:prstGeom prst="ellipse">
             <a:avLst/>
@@ -19995,8 +20112,8 @@
         </p:nvSpPr>
         <p:spPr>
           <a:xfrm>
-            <a:off x="5589910" y="883493"/>
-            <a:ext cx="1012789" cy="1012789"/>
+            <a:off x="5496422" y="826581"/>
+            <a:ext cx="1199766" cy="1199766"/>
           </a:xfrm>
           <a:prstGeom prst="ellipse">
             <a:avLst/>
@@ -20017,8 +20134,8 @@
         </p:nvSpPr>
         <p:spPr>
           <a:xfrm>
-            <a:off x="6096305" y="765810"/>
-            <a:ext cx="0" cy="59436"/>
+            <a:off x="6096305" y="687172"/>
+            <a:ext cx="0" cy="70409"/>
           </a:xfrm>
           <a:prstGeom prst="line">
             <a:avLst/>
@@ -20040,8 +20157,8 @@
         </p:nvSpPr>
         <p:spPr>
           <a:xfrm>
-            <a:off x="6096305" y="1954530"/>
-            <a:ext cx="0" cy="59436"/>
+            <a:off x="6096305" y="2095348"/>
+            <a:ext cx="0" cy="70409"/>
           </a:xfrm>
           <a:prstGeom prst="line">
             <a:avLst/>
@@ -20063,8 +20180,8 @@
         </p:nvSpPr>
         <p:spPr>
           <a:xfrm>
-            <a:off x="5472227" y="1389888"/>
-            <a:ext cx="59436" cy="0"/>
+            <a:off x="5357012" y="1426464"/>
+            <a:ext cx="70409" cy="0"/>
           </a:xfrm>
           <a:prstGeom prst="line">
             <a:avLst/>
@@ -20086,8 +20203,8 @@
         </p:nvSpPr>
         <p:spPr>
           <a:xfrm>
-            <a:off x="6660947" y="1389888"/>
-            <a:ext cx="59436" cy="0"/>
+            <a:off x="6765188" y="1426464"/>
+            <a:ext cx="70409" cy="0"/>
           </a:xfrm>
           <a:prstGeom prst="line">
             <a:avLst/>
@@ -20109,8 +20226,8 @@
         </p:nvSpPr>
         <p:spPr>
           <a:xfrm>
-            <a:off x="5589910" y="883493"/>
-            <a:ext cx="1012789" cy="1012789"/>
+            <a:off x="5496422" y="826581"/>
+            <a:ext cx="1199766" cy="1199766"/>
           </a:xfrm>
           <a:prstGeom prst="rect">
             <a:avLst/>
@@ -20126,7 +20243,7 @@
               <a:buNone/>
             </a:pPr>
             <a:r>
-              <a:rPr lang="en-US" sz="4700" b="1" dirty="0">
+              <a:rPr lang="en-US" sz="5500" b="1" dirty="0">
                 <a:solidFill>
                   <a:srgbClr val="A31621"/>
                 </a:solidFill>
@@ -20136,7 +20253,7 @@
               </a:rPr>
               <a:t>D</a:t>
             </a:r>
-            <a:endParaRPr lang="en-US" sz="4700" dirty="0"/>
+            <a:endParaRPr lang="en-US" sz="5500" dirty="0"/>
           </a:p>
         </p:txBody>
       </p:sp>
@@ -20148,7 +20265,7 @@
         </p:nvSpPr>
         <p:spPr>
           <a:xfrm>
-            <a:off x="1706728" y="2231136"/>
+            <a:off x="1706728" y="2304288"/>
             <a:ext cx="8778240" cy="1667134"/>
           </a:xfrm>
           <a:prstGeom prst="rect">
@@ -20168,7 +20285,7 @@
         </p:nvSpPr>
         <p:spPr>
           <a:xfrm>
-            <a:off x="2163928" y="2487168"/>
+            <a:off x="2163928" y="2560320"/>
             <a:ext cx="7863840" cy="880750"/>
           </a:xfrm>
           <a:prstGeom prst="rect">
@@ -20207,7 +20324,7 @@
         </p:nvSpPr>
         <p:spPr>
           <a:xfrm>
-            <a:off x="2163928" y="3495934"/>
+            <a:off x="2163928" y="3569086"/>
             <a:ext cx="7863840" cy="219456"/>
           </a:xfrm>
           <a:prstGeom prst="rect">
@@ -20246,7 +20363,7 @@
         </p:nvSpPr>
         <p:spPr>
           <a:xfrm>
-            <a:off x="813816" y="4209166"/>
+            <a:off x="813816" y="4282318"/>
             <a:ext cx="10570464" cy="658368"/>
           </a:xfrm>
           <a:prstGeom prst="rect">
@@ -20285,7 +20402,7 @@
         </p:nvSpPr>
         <p:spPr>
           <a:xfrm>
-            <a:off x="813816" y="4958974"/>
+            <a:off x="813816" y="5032126"/>
             <a:ext cx="10570464" cy="256032"/>
           </a:xfrm>
           <a:prstGeom prst="rect">

--- a/decks/build-your-own-donna-v2.pptx
+++ b/decks/build-your-own-donna-v2.pptx
@@ -989,7 +989,7 @@
               <a:t>[TIMING] 1 min.
 [SAY] Step two is the document. Everything else today is plumbing.
 [DO] Pip moves to REVISE.
-[NEXT] Four blanks, and they are the only editing anyone does all day.</a:t>
+[NEXT] Five questions, and she does the writing.</a:t>
             </a:r>
             <a:endParaRPr lang="en-US" dirty="0"/>
           </a:p>
@@ -1078,9 +1078,9 @@
             <a:r>
               <a:rPr lang="en-US" dirty="0"/>
               <a:t>[TIMING] 10 min.
-[SAY] Four blanks, and they are the only editing you do all day. The delegates blank is the one the pilot group left empty, so call it out: yellow only works if she knows who owns what.
-[DO] Give them six to eight quiet minutes to fill blanks. Circulate. Then everyone runs: Triage my inbox.
-[WATCH] Someone will triage from OUTSIDE the project and get generic results. Make sure they are inside the Donna project.
+[SAY] You do not write the document any more. You answer five questions and she writes it. Question 1 is the quadrant from earlier: closed or open, tell or ask. Answer it out loud, together; it is the confirmation everyone is in the right place.
+[DO] Everyone pastes the template from the site. Watch every screen show QUESTION 1 OF 5, then let them run. She adapts to their corner: fast for TIME, confirmed-back for ACCURACY, people-first for TRUST, loop-closing for VISION.
+[WATCH] She reaches THE FINAL QUESTION by minute six on her own. When I call time, anyone not there types: final question. Someone will paste OUTSIDE the Donna project and get generic results; get them inside the project.
 [NEXT] The checkpoint, and the ritual.</a:t>
             </a:r>
             <a:endParaRPr lang="en-US" dirty="0"/>
@@ -1171,8 +1171,8 @@
               <a:rPr lang="en-US" dirty="0"/>
               <a:t>[TIMING] 4 min.
 [SAY] You will never re-explain your rules again. That is the difference between a chat and a project.
-[DO] Everyone runs the one-sentence ritual inside the project. Hold until every screen shows a table.
-[WATCH] Then the green light: yes, draft the reds and the yellow handoffs.
+[DO] Gate first: is THE FINAL QUESTION on your screen? Anyone who is not there types: final question. After the OPEN FOR BUSINESS banner, everyone runs the one-sentence ritual inside the project. Hold until every screen shows a table.
+[WATCH] Reply-Now drafts are already sitting in their email Drafts folder. Have them check; that is the gasp.
 [NEXT] Step three. The document leaves your hands.</a:t>
             </a:r>
             <a:endParaRPr lang="en-US" dirty="0"/>
@@ -1354,8 +1354,8 @@
               <a:rPr lang="en-US" dirty="0"/>
               <a:t>[TIMING] 6 min.
 [SAY] A skill written in chat does not exist in Cowork until you upload it. This is the step the pilot group missed, so go slow and demo it on screen.
-[DO] Three beats. She writes it. You DOWNLOAD it. You UPLOAD it into Cowork skills. Wait until every screen shows donna-replies in the list.
-[WATCH] No external URL is needed any more: the project already knows the VIPs, the delegates, the voice and the rules, so she writes the file from what she has.
+[DO] Three beats. She writes it. You DOWNLOAD it. You UPLOAD it into Cowork skills. Wait until every screen shows donna-triage in the list.
+[WATCH] Stay in the SAME chat as step two; a fresh chat has not met them yet and writes a blank template. The interview answers live in that conversation.
 [NEXT] Before we schedule it, the promise.</a:t>
             </a:r>
             <a:endParaRPr lang="en-US" dirty="0"/>
@@ -1629,7 +1629,7 @@
             <a:r>
               <a:rPr lang="en-US" dirty="0"/>
               <a:t>[TIMING] 4 min.
-[SAY] The last line of that prompt is the finale: a dry run, right now.
+[SAY] The last line of that prompt is the finale: a dry run, right now, with today's event ten minutes out so the email lands while we are all still in the room.
 [DO] Grab the prompt from the site rather than retyping. If someone cannot find scheduled tasks, ask Claude where they are; the area moved in a recent update.
 [WATCH] Gmail attaches a true EMAIL reminder. Outlook gets a calendar notification instead, because Microsoft Graph cannot set email reminders on events. Verified. Say it plainly rather than promising something Outlook cannot do.
 [NEXT] Everybody watch their screen.</a:t>
@@ -1722,7 +1722,7 @@
               <a:rPr lang="en-US" dirty="0"/>
               <a:t>[TIMING] 3 min.
 [SAY] Nothing. Let the laptops ping.
-[DO] The closing moment of the build: everyone watches the dry run land. Doc in the Donna Briefings folder, event on today's calendar, drafts waiting. Hold the silence.
+[DO] The closing moment of the build: everyone watches the dry run land. Event on today's calendar with the whole triage in its description, drafts waiting, the email minutes out. Hold the silence.
 [WATCH] Point at the pip: all four stations are lit for the first time. They just ran the Amazon execution flywheel on their own inbox. That is the payoff of the whole device.
 [NEXT] Then the reframe: this was never about email.</a:t>
             </a:r>
@@ -2180,9 +2180,9 @@
             <a:r>
               <a:rPr lang="en-US" dirty="0"/>
               <a:t>[TIMING] 2 min.
-[SAY] Tomorrow at 4:54 the briefing arrives on its own for the first time. When it does, that is Donna saying she has got it from here.
+[SAY] Tomorrow at 4:54 the triage arrives on its own for the first time. When it does, that is Donna saying she has got it from here.
 [DO] Questions any time: denise@denisegosnell.ai.
-[WATCH] The workshop resources are NOT on a public link right now. Do not promise a URL from the stage. If someone asks for the prompts, offer to email them.
+[WATCH] The workshop site is public: denisekgosnell.github.io/Donna. Every prompt on it has a copy button; point people there instead of retyping anything.
 [NEXT] Done. You're weird. We'll be friends.</a:t>
             </a:r>
             <a:endParaRPr lang="en-US" dirty="0"/>
@@ -5998,7 +5998,7 @@
                 <a:ea typeface="Arial" pitchFamily="34" charset="-122"/>
                 <a:cs typeface="Arial" pitchFamily="34" charset="-120"/>
               </a:rPr>
-              <a:t>You brief her once. Red, yellow, gray. Your people, your priorities, your voice.</a:t>
+              <a:t>She asks five questions, learns which executive you are, and writes your rules herself.</a:t>
             </a:r>
             <a:endParaRPr lang="en-US" sz="1300" dirty="0"/>
           </a:p>
@@ -9663,7 +9663,7 @@
         <p:spPr>
           <a:xfrm>
             <a:off x="813816" y="1775155"/>
-            <a:ext cx="6675120" cy="3300984"/>
+            <a:ext cx="6675120" cy="2176272"/>
           </a:xfrm>
           <a:prstGeom prst="rect">
             <a:avLst/>
@@ -9707,7 +9707,7 @@
                 <a:ea typeface="Arial" pitchFamily="34" charset="-122"/>
                 <a:cs typeface="Arial" pitchFamily="34" charset="-120"/>
               </a:rPr>
-              <a:t>PROJECT INSTRUCTIONS · FILL 4 BLANKS</a:t>
+              <a:t>PASTE INTO A NEW CHAT IN YOUR DONNA PROJECT</a:t>
             </a:r>
             <a:endParaRPr lang="en-US" sz="1100" dirty="0"/>
           </a:p>
@@ -9722,7 +9722,7 @@
         <p:spPr>
           <a:xfrm>
             <a:off x="1069848" y="2232355"/>
-            <a:ext cx="6163056" cy="2752344"/>
+            <a:ext cx="6163056" cy="1627632"/>
           </a:xfrm>
           <a:prstGeom prst="rect">
             <a:avLst/>
@@ -9749,7 +9749,7 @@
                 <a:ea typeface="Courier New" pitchFamily="34" charset="-122"/>
                 <a:cs typeface="Courier New" pitchFamily="34" charset="-120"/>
               </a:rPr>
-              <a:t>You are Donna, my inbox triage assistant.</a:t>
+              <a:t>Here is my triage playbook template. Read it,</a:t>
             </a:r>
             <a:endParaRPr lang="en-US" sz="1200" dirty="0"/>
           </a:p>
@@ -9769,7 +9769,7 @@
                 <a:ea typeface="Courier New" pitchFamily="34" charset="-122"/>
                 <a:cs typeface="Courier New" pitchFamily="34" charset="-120"/>
               </a:rPr>
-              <a:t>When I say "triage my inbox":</a:t>
+              <a:t>then run its Setup Interview on me exactly as</a:t>
             </a:r>
             <a:endParaRPr lang="en-US" sz="1200" dirty="0"/>
           </a:p>
@@ -9789,7 +9789,7 @@
                 <a:ea typeface="Courier New" pitchFamily="34" charset="-122"/>
                 <a:cs typeface="Courier New" pitchFamily="34" charset="-120"/>
               </a:rPr>
-              <a:t>1. Review my inbox (default: the last 24 hours).</a:t>
+              <a:t>written: five questions, about six minutes, one</a:t>
             </a:r>
             <a:endParaRPr lang="en-US" sz="1200" dirty="0"/>
           </a:p>
@@ -9809,7 +9809,7 @@
                 <a:ea typeface="Courier New" pitchFamily="34" charset="-122"/>
                 <a:cs typeface="Courier New" pitchFamily="34" charset="-120"/>
               </a:rPr>
-              <a:t>2. Sort every thread into three buckets:</a:t>
+              <a:t>question at a time. Start now with your greeting</a:t>
             </a:r>
             <a:endParaRPr lang="en-US" sz="1200" dirty="0"/>
           </a:p>
@@ -9829,7 +9829,7 @@
                 <a:ea typeface="Courier New" pitchFamily="34" charset="-122"/>
                 <a:cs typeface="Courier New" pitchFamily="34" charset="-120"/>
               </a:rPr>
-              <a:t>   RED, NEEDS ME - my VIPs, plus my #1 project:</a:t>
+              <a:t>and Question 1 of 5.</a:t>
             </a:r>
             <a:endParaRPr lang="en-US" sz="1200" dirty="0"/>
           </a:p>
@@ -9840,17 +9840,9 @@
               </a:lnSpc>
               <a:buNone/>
             </a:pPr>
-            <a:r>
-              <a:rPr lang="en-US" sz="1200" dirty="0">
-                <a:solidFill>
-                  <a:srgbClr val="F7F3EA"/>
-                </a:solidFill>
-                <a:latin typeface="Courier New" pitchFamily="34" charset="0"/>
-                <a:ea typeface="Courier New" pitchFamily="34" charset="-122"/>
-                <a:cs typeface="Courier New" pitchFamily="34" charset="-120"/>
-              </a:rPr>
-              <a:t>   </a:t>
-            </a:r>
+            <a:endParaRPr lang="en-US" sz="1200" dirty="0"/>
+          </a:p>
+          <a:p>
             <a:pPr indent="0" marL="0">
               <a:lnSpc>
                 <a:spcPts val="1480"/>
@@ -9858,24 +9850,119 @@
               <a:buNone/>
             </a:pPr>
             <a:r>
-              <a:rPr lang="en-US" sz="1200" b="1" dirty="0">
-                <a:solidFill>
-                  <a:srgbClr val="E7C766"/>
+              <a:rPr lang="en-US" sz="1200" dirty="0">
+                <a:solidFill>
+                  <a:srgbClr val="F7F3EA"/>
                 </a:solidFill>
                 <a:latin typeface="Courier New" pitchFamily="34" charset="0"/>
                 <a:ea typeface="Courier New" pitchFamily="34" charset="-122"/>
                 <a:cs typeface="Courier New" pitchFamily="34" charset="-120"/>
               </a:rPr>
-              <a:t>[ADD 3-5 NAMES + EMAILS] . [ADD YOUR #1 DEAL]</a:t>
-            </a:r>
+              <a:t>[the full template rides along in the same paste.</a:t>
+            </a:r>
+            <a:endParaRPr lang="en-US" sz="1200" dirty="0"/>
+          </a:p>
+          <a:p>
             <a:pPr indent="0" marL="0">
               <a:lnSpc>
                 <a:spcPts val="1480"/>
               </a:lnSpc>
               <a:buNone/>
             </a:pPr>
+            <a:r>
+              <a:rPr lang="en-US" sz="1200" dirty="0">
+                <a:solidFill>
+                  <a:srgbClr val="F7F3EA"/>
+                </a:solidFill>
+                <a:latin typeface="Courier New" pitchFamily="34" charset="0"/>
+                <a:ea typeface="Courier New" pitchFamily="34" charset="-122"/>
+                <a:cs typeface="Courier New" pitchFamily="34" charset="-120"/>
+              </a:rPr>
+              <a:t> One copy button on the site, step two.]</a:t>
+            </a:r>
             <a:endParaRPr lang="en-US" sz="1200" dirty="0"/>
           </a:p>
+        </p:txBody>
+      </p:sp>
+      <p:sp>
+        <p:nvSpPr>
+          <p:cNvPr id="20" name="Shape 18"/>
+          <p:cNvSpPr/>
+          <p:nvPr/>
+        </p:nvSpPr>
+        <p:spPr>
+          <a:xfrm>
+            <a:off x="813816" y="4170883"/>
+            <a:ext cx="6675120" cy="864108"/>
+          </a:xfrm>
+          <a:prstGeom prst="rect">
+            <a:avLst/>
+          </a:prstGeom>
+          <a:solidFill>
+            <a:srgbClr val="14213D"/>
+          </a:solidFill>
+          <a:ln/>
+        </p:spPr>
+      </p:sp>
+      <p:sp>
+        <p:nvSpPr>
+          <p:cNvPr id="21" name="Text 19"/>
+          <p:cNvSpPr/>
+          <p:nvPr/>
+        </p:nvSpPr>
+        <p:spPr>
+          <a:xfrm>
+            <a:off x="1069848" y="4344619"/>
+            <a:ext cx="6163056" cy="201168"/>
+          </a:xfrm>
+          <a:prstGeom prst="rect">
+            <a:avLst/>
+          </a:prstGeom>
+          <a:noFill/>
+          <a:ln/>
+        </p:spPr>
+        <p:txBody>
+          <a:bodyPr wrap="square" lIns="0" tIns="0" rIns="0" bIns="0" rtlCol="0" anchor="ctr"/>
+          <a:lstStyle/>
+          <a:p>
+            <a:pPr indent="0" marL="0">
+              <a:buNone/>
+            </a:pPr>
+            <a:r>
+              <a:rPr lang="en-US" sz="1100" b="1" spc="160" kern="0" dirty="0">
+                <a:solidFill>
+                  <a:srgbClr val="E7C766"/>
+                </a:solidFill>
+                <a:latin typeface="Arial" pitchFamily="34" charset="0"/>
+                <a:ea typeface="Arial" pitchFamily="34" charset="-122"/>
+                <a:cs typeface="Arial" pitchFamily="34" charset="-120"/>
+              </a:rPr>
+              <a:t>IF TIME IS CALLED · SHE JUMPS TO THE END</a:t>
+            </a:r>
+            <a:endParaRPr lang="en-US" sz="1100" dirty="0"/>
+          </a:p>
+        </p:txBody>
+      </p:sp>
+      <p:sp>
+        <p:nvSpPr>
+          <p:cNvPr id="22" name="Text 20"/>
+          <p:cNvSpPr/>
+          <p:nvPr/>
+        </p:nvSpPr>
+        <p:spPr>
+          <a:xfrm>
+            <a:off x="1069848" y="4628083"/>
+            <a:ext cx="6163056" cy="315468"/>
+          </a:xfrm>
+          <a:prstGeom prst="rect">
+            <a:avLst/>
+          </a:prstGeom>
+          <a:noFill/>
+          <a:ln/>
+        </p:spPr>
+        <p:txBody>
+          <a:bodyPr wrap="square" lIns="0" tIns="0" rIns="0" bIns="0" rtlCol="0" anchor="t"/>
+          <a:lstStyle/>
           <a:p>
             <a:pPr indent="0" marL="0">
               <a:lnSpc>
@@ -9892,212 +9979,15 @@
                 <a:ea typeface="Courier New" pitchFamily="34" charset="-122"/>
                 <a:cs typeface="Courier New" pitchFamily="34" charset="-120"/>
               </a:rPr>
-              <a:t>   YELLOW, DELEGATE - work my team owns:</a:t>
+              <a:t>final question</a:t>
             </a:r>
             <a:endParaRPr lang="en-US" sz="1200" dirty="0"/>
           </a:p>
-          <a:p>
-            <a:pPr indent="0" marL="0">
-              <a:lnSpc>
-                <a:spcPts val="1480"/>
-              </a:lnSpc>
-              <a:buNone/>
-            </a:pPr>
-            <a:r>
-              <a:rPr lang="en-US" sz="1200" dirty="0">
-                <a:solidFill>
-                  <a:srgbClr val="F7F3EA"/>
-                </a:solidFill>
-                <a:latin typeface="Courier New" pitchFamily="34" charset="0"/>
-                <a:ea typeface="Courier New" pitchFamily="34" charset="-122"/>
-                <a:cs typeface="Courier New" pitchFamily="34" charset="-120"/>
-              </a:rPr>
-              <a:t>   </a:t>
-            </a:r>
-            <a:pPr indent="0" marL="0">
-              <a:lnSpc>
-                <a:spcPts val="1480"/>
-              </a:lnSpc>
-              <a:buNone/>
-            </a:pPr>
-            <a:r>
-              <a:rPr lang="en-US" sz="1200" b="1" dirty="0">
-                <a:solidFill>
-                  <a:srgbClr val="E7C766"/>
-                </a:solidFill>
-                <a:latin typeface="Courier New" pitchFamily="34" charset="0"/>
-                <a:ea typeface="Courier New" pitchFamily="34" charset="-122"/>
-                <a:cs typeface="Courier New" pitchFamily="34" charset="-120"/>
-              </a:rPr>
-              <a:t>[ADD 1-3 DELEGATES + LANES, e.g. "Sam: billing"]</a:t>
-            </a:r>
-            <a:pPr indent="0" marL="0">
-              <a:lnSpc>
-                <a:spcPts val="1480"/>
-              </a:lnSpc>
-              <a:buNone/>
-            </a:pPr>
-            <a:endParaRPr lang="en-US" sz="1200" dirty="0"/>
-          </a:p>
-          <a:p>
-            <a:pPr indent="0" marL="0">
-              <a:lnSpc>
-                <a:spcPts val="1480"/>
-              </a:lnSpc>
-              <a:buNone/>
-            </a:pPr>
-            <a:r>
-              <a:rPr lang="en-US" sz="1200" dirty="0">
-                <a:solidFill>
-                  <a:srgbClr val="F7F3EA"/>
-                </a:solidFill>
-                <a:latin typeface="Courier New" pitchFamily="34" charset="0"/>
-                <a:ea typeface="Courier New" pitchFamily="34" charset="-122"/>
-                <a:cs typeface="Courier New" pitchFamily="34" charset="-120"/>
-              </a:rPr>
-              <a:t>   GRAY, IGNORE - newsletters, cold outreach, noise.</a:t>
-            </a:r>
-            <a:endParaRPr lang="en-US" sz="1200" dirty="0"/>
-          </a:p>
-          <a:p>
-            <a:pPr indent="0" marL="0">
-              <a:lnSpc>
-                <a:spcPts val="1480"/>
-              </a:lnSpc>
-              <a:buNone/>
-            </a:pPr>
-            <a:r>
-              <a:rPr lang="en-US" sz="1200" dirty="0">
-                <a:solidFill>
-                  <a:srgbClr val="F7F3EA"/>
-                </a:solidFill>
-                <a:latin typeface="Courier New" pitchFamily="34" charset="0"/>
-                <a:ea typeface="Courier New" pitchFamily="34" charset="-122"/>
-                <a:cs typeface="Courier New" pitchFamily="34" charset="-120"/>
-              </a:rPr>
-              <a:t>3. Show me ONE table: sender, subject, bucket, why,</a:t>
-            </a:r>
-            <a:endParaRPr lang="en-US" sz="1200" dirty="0"/>
-          </a:p>
-          <a:p>
-            <a:pPr indent="0" marL="0">
-              <a:lnSpc>
-                <a:spcPts val="1480"/>
-              </a:lnSpc>
-              <a:buNone/>
-            </a:pPr>
-            <a:r>
-              <a:rPr lang="en-US" sz="1200" dirty="0">
-                <a:solidFill>
-                  <a:srgbClr val="F7F3EA"/>
-                </a:solidFill>
-                <a:latin typeface="Courier New" pitchFamily="34" charset="0"/>
-                <a:ea typeface="Courier New" pitchFamily="34" charset="-122"/>
-                <a:cs typeface="Courier New" pitchFamily="34" charset="-120"/>
-              </a:rPr>
-              <a:t>   next move.</a:t>
-            </a:r>
-            <a:endParaRPr lang="en-US" sz="1200" dirty="0"/>
-          </a:p>
-          <a:p>
-            <a:pPr indent="0" marL="0">
-              <a:lnSpc>
-                <a:spcPts val="1480"/>
-              </a:lnSpc>
-              <a:buNone/>
-            </a:pPr>
-            <a:r>
-              <a:rPr lang="en-US" sz="1200" dirty="0">
-                <a:solidFill>
-                  <a:srgbClr val="F7F3EA"/>
-                </a:solidFill>
-                <a:latin typeface="Courier New" pitchFamily="34" charset="0"/>
-                <a:ea typeface="Courier New" pitchFamily="34" charset="-122"/>
-                <a:cs typeface="Courier New" pitchFamily="34" charset="-120"/>
-              </a:rPr>
-              <a:t>4. Draft replies for REDs (my voice: </a:t>
-            </a:r>
-            <a:pPr indent="0" marL="0">
-              <a:lnSpc>
-                <a:spcPts val="1480"/>
-              </a:lnSpc>
-              <a:buNone/>
-            </a:pPr>
-            <a:r>
-              <a:rPr lang="en-US" sz="1200" b="1" dirty="0">
-                <a:solidFill>
-                  <a:srgbClr val="E7C766"/>
-                </a:solidFill>
-                <a:latin typeface="Courier New" pitchFamily="34" charset="0"/>
-                <a:ea typeface="Courier New" pitchFamily="34" charset="-122"/>
-                <a:cs typeface="Courier New" pitchFamily="34" charset="-120"/>
-              </a:rPr>
-              <a:t>[ADD 3 WORDS]</a:t>
-            </a:r>
-            <a:pPr indent="0" marL="0">
-              <a:lnSpc>
-                <a:spcPts val="1480"/>
-              </a:lnSpc>
-              <a:buNone/>
-            </a:pPr>
-            <a:r>
-              <a:rPr lang="en-US" sz="1200" dirty="0">
-                <a:solidFill>
-                  <a:srgbClr val="F7F3EA"/>
-                </a:solidFill>
-                <a:latin typeface="Courier New" pitchFamily="34" charset="0"/>
-                <a:ea typeface="Courier New" pitchFamily="34" charset="-122"/>
-                <a:cs typeface="Courier New" pitchFamily="34" charset="-120"/>
-              </a:rPr>
-              <a:t>)</a:t>
-            </a:r>
-            <a:endParaRPr lang="en-US" sz="1200" dirty="0"/>
-          </a:p>
-          <a:p>
-            <a:pPr indent="0" marL="0">
-              <a:lnSpc>
-                <a:spcPts val="1480"/>
-              </a:lnSpc>
-              <a:buNone/>
-            </a:pPr>
-            <a:r>
-              <a:rPr lang="en-US" sz="1200" dirty="0">
-                <a:solidFill>
-                  <a:srgbClr val="F7F3EA"/>
-                </a:solidFill>
-                <a:latin typeface="Courier New" pitchFamily="34" charset="0"/>
-                <a:ea typeface="Courier New" pitchFamily="34" charset="-122"/>
-                <a:cs typeface="Courier New" pitchFamily="34" charset="-120"/>
-              </a:rPr>
-              <a:t>   and handoff notes for YELLOWs. Save to Drafts.</a:t>
-            </a:r>
-            <a:endParaRPr lang="en-US" sz="1200" dirty="0"/>
-          </a:p>
-          <a:p>
-            <a:pPr indent="0" marL="0">
-              <a:lnSpc>
-                <a:spcPts val="1480"/>
-              </a:lnSpc>
-              <a:buNone/>
-            </a:pPr>
-            <a:r>
-              <a:rPr lang="en-US" sz="1200" dirty="0">
-                <a:solidFill>
-                  <a:srgbClr val="F7F3EA"/>
-                </a:solidFill>
-                <a:latin typeface="Courier New" pitchFamily="34" charset="0"/>
-                <a:ea typeface="Courier New" pitchFamily="34" charset="-122"/>
-                <a:cs typeface="Courier New" pitchFamily="34" charset="-120"/>
-              </a:rPr>
-              <a:t>Never send anything. Never delete. Drafts only.</a:t>
-            </a:r>
-            <a:endParaRPr lang="en-US" sz="1200" dirty="0"/>
-          </a:p>
-        </p:txBody>
-      </p:sp>
-      <p:sp>
-        <p:nvSpPr>
-          <p:cNvPr id="20" name="Text 18"/>
+        </p:txBody>
+      </p:sp>
+      <p:sp>
+        <p:nvSpPr>
+          <p:cNvPr id="23" name="Text 21"/>
           <p:cNvSpPr/>
           <p:nvPr/>
         </p:nvSpPr>
@@ -10128,7 +10018,7 @@
                 <a:ea typeface="Arial" pitchFamily="34" charset="-122"/>
                 <a:cs typeface="Arial" pitchFamily="34" charset="-120"/>
               </a:rPr>
-              <a:t>THE FOUR BLANKS</a:t>
+              <a:t>THE FIVE QUESTIONS</a:t>
             </a:r>
             <a:endParaRPr lang="en-US" sz="1300" dirty="0"/>
           </a:p>
@@ -10136,13 +10026,13 @@
       </p:sp>
       <p:sp>
         <p:nvSpPr>
-          <p:cNvPr id="21" name="Shape 19"/>
+          <p:cNvPr id="24" name="Shape 22"/>
           <p:cNvSpPr/>
           <p:nvPr/>
         </p:nvSpPr>
         <p:spPr>
           <a:xfrm rot="2700000">
-            <a:off x="7854696" y="2268931"/>
+            <a:off x="7854696" y="2195779"/>
             <a:ext cx="100584" cy="100584"/>
           </a:xfrm>
           <a:prstGeom prst="rect">
@@ -10161,13 +10051,13 @@
       </p:sp>
       <p:sp>
         <p:nvSpPr>
-          <p:cNvPr id="22" name="Text 20"/>
-          <p:cNvSpPr/>
-          <p:nvPr/>
-        </p:nvSpPr>
-        <p:spPr>
-          <a:xfrm>
-            <a:off x="8165592" y="2214067"/>
+          <p:cNvPr id="25" name="Text 23"/>
+          <p:cNvSpPr/>
+          <p:nvPr/>
+        </p:nvSpPr>
+        <p:spPr>
+          <a:xfrm>
+            <a:off x="8165592" y="2140915"/>
             <a:ext cx="3218688" cy="315468"/>
           </a:xfrm>
           <a:prstGeom prst="rect">
@@ -10192,7 +10082,7 @@
                 <a:ea typeface="Arial" pitchFamily="34" charset="-122"/>
                 <a:cs typeface="Arial" pitchFamily="34" charset="-120"/>
               </a:rPr>
-              <a:t>Your always-red list</a:t>
+              <a:t>1 · Which executive are you?</a:t>
             </a:r>
             <a:endParaRPr lang="en-US" sz="1400" dirty="0"/>
           </a:p>
@@ -10200,13 +10090,13 @@
       </p:sp>
       <p:sp>
         <p:nvSpPr>
-          <p:cNvPr id="23" name="Text 21"/>
-          <p:cNvSpPr/>
-          <p:nvPr/>
-        </p:nvSpPr>
-        <p:spPr>
-          <a:xfrm>
-            <a:off x="8165592" y="2529535"/>
+          <p:cNvPr id="26" name="Text 24"/>
+          <p:cNvSpPr/>
+          <p:nvPr/>
+        </p:nvSpPr>
+        <p:spPr>
+          <a:xfrm>
+            <a:off x="8165592" y="2456383"/>
             <a:ext cx="3218688" cy="283464"/>
           </a:xfrm>
           <a:prstGeom prst="rect">
@@ -10231,7 +10121,7 @@
                 <a:ea typeface="Arial" pitchFamily="34" charset="-122"/>
                 <a:cs typeface="Arial" pitchFamily="34" charset="-120"/>
               </a:rPr>
-              <a:t>the people who jump every queue</a:t>
+              <a:t>closed or open, tell first or ask first</a:t>
             </a:r>
             <a:endParaRPr lang="en-US" sz="1200" dirty="0"/>
           </a:p>
@@ -10239,13 +10129,13 @@
       </p:sp>
       <p:sp>
         <p:nvSpPr>
-          <p:cNvPr id="24" name="Shape 22"/>
+          <p:cNvPr id="27" name="Shape 25"/>
           <p:cNvSpPr/>
           <p:nvPr/>
         </p:nvSpPr>
         <p:spPr>
           <a:xfrm rot="2700000">
-            <a:off x="7854696" y="3050743"/>
+            <a:off x="7854696" y="2886151"/>
             <a:ext cx="100584" cy="100584"/>
           </a:xfrm>
           <a:prstGeom prst="rect">
@@ -10264,13 +10154,13 @@
       </p:sp>
       <p:sp>
         <p:nvSpPr>
-          <p:cNvPr id="25" name="Text 23"/>
-          <p:cNvSpPr/>
-          <p:nvPr/>
-        </p:nvSpPr>
-        <p:spPr>
-          <a:xfrm>
-            <a:off x="8165592" y="2995879"/>
+          <p:cNvPr id="28" name="Text 26"/>
+          <p:cNvSpPr/>
+          <p:nvPr/>
+        </p:nvSpPr>
+        <p:spPr>
+          <a:xfrm>
+            <a:off x="8165592" y="2831287"/>
             <a:ext cx="3218688" cy="315468"/>
           </a:xfrm>
           <a:prstGeom prst="rect">
@@ -10295,7 +10185,7 @@
                 <a:ea typeface="Arial" pitchFamily="34" charset="-122"/>
                 <a:cs typeface="Arial" pitchFamily="34" charset="-120"/>
               </a:rPr>
-              <a:t>Your #1 deal</a:t>
+              <a:t>2 · Reply Now</a:t>
             </a:r>
             <a:endParaRPr lang="en-US" sz="1400" dirty="0"/>
           </a:p>
@@ -10303,13 +10193,13 @@
       </p:sp>
       <p:sp>
         <p:nvSpPr>
-          <p:cNvPr id="26" name="Text 24"/>
-          <p:cNvSpPr/>
-          <p:nvPr/>
-        </p:nvSpPr>
-        <p:spPr>
-          <a:xfrm>
-            <a:off x="8165592" y="3311347"/>
+          <p:cNvPr id="29" name="Text 27"/>
+          <p:cNvSpPr/>
+          <p:nvPr/>
+        </p:nvSpPr>
+        <p:spPr>
+          <a:xfrm>
+            <a:off x="8165592" y="3146755"/>
             <a:ext cx="3218688" cy="283464"/>
           </a:xfrm>
           <a:prstGeom prst="rect">
@@ -10334,7 +10224,7 @@
                 <a:ea typeface="Arial" pitchFamily="34" charset="-122"/>
                 <a:cs typeface="Arial" pitchFamily="34" charset="-120"/>
               </a:rPr>
-              <a:t>the one project that is always urgent</a:t>
+              <a:t>the 3 to 5 people who never wait</a:t>
             </a:r>
             <a:endParaRPr lang="en-US" sz="1200" dirty="0"/>
           </a:p>
@@ -10342,13 +10232,13 @@
       </p:sp>
       <p:sp>
         <p:nvSpPr>
-          <p:cNvPr id="27" name="Shape 25"/>
+          <p:cNvPr id="30" name="Shape 28"/>
           <p:cNvSpPr/>
           <p:nvPr/>
         </p:nvSpPr>
         <p:spPr>
           <a:xfrm rot="2700000">
-            <a:off x="7854696" y="3832555"/>
+            <a:off x="7854696" y="3576523"/>
             <a:ext cx="100584" cy="100584"/>
           </a:xfrm>
           <a:prstGeom prst="rect">
@@ -10367,13 +10257,13 @@
       </p:sp>
       <p:sp>
         <p:nvSpPr>
-          <p:cNvPr id="28" name="Text 26"/>
-          <p:cNvSpPr/>
-          <p:nvPr/>
-        </p:nvSpPr>
-        <p:spPr>
-          <a:xfrm>
-            <a:off x="8165592" y="3777691"/>
+          <p:cNvPr id="31" name="Text 29"/>
+          <p:cNvSpPr/>
+          <p:nvPr/>
+        </p:nvSpPr>
+        <p:spPr>
+          <a:xfrm>
+            <a:off x="8165592" y="3521659"/>
             <a:ext cx="3218688" cy="315468"/>
           </a:xfrm>
           <a:prstGeom prst="rect">
@@ -10398,7 +10288,7 @@
                 <a:ea typeface="Arial" pitchFamily="34" charset="-122"/>
                 <a:cs typeface="Arial" pitchFamily="34" charset="-120"/>
               </a:rPr>
-              <a:t>Your delegates and lanes</a:t>
+              <a:t>3 · By End of Day</a:t>
             </a:r>
             <a:endParaRPr lang="en-US" sz="1400" dirty="0"/>
           </a:p>
@@ -10406,13 +10296,13 @@
       </p:sp>
       <p:sp>
         <p:nvSpPr>
-          <p:cNvPr id="29" name="Text 27"/>
-          <p:cNvSpPr/>
-          <p:nvPr/>
-        </p:nvSpPr>
-        <p:spPr>
-          <a:xfrm>
-            <a:off x="8165592" y="4093159"/>
+          <p:cNvPr id="32" name="Text 30"/>
+          <p:cNvSpPr/>
+          <p:nvPr/>
+        </p:nvSpPr>
+        <p:spPr>
+          <a:xfrm>
+            <a:off x="8165592" y="3837127"/>
             <a:ext cx="3218688" cy="283464"/>
           </a:xfrm>
           <a:prstGeom prst="rect">
@@ -10437,7 +10327,7 @@
                 <a:ea typeface="Arial" pitchFamily="34" charset="-122"/>
                 <a:cs typeface="Arial" pitchFamily="34" charset="-120"/>
               </a:rPr>
-              <a:t>one to three people, and what each owns</a:t>
+              <a:t>your leadership team</a:t>
             </a:r>
             <a:endParaRPr lang="en-US" sz="1200" dirty="0"/>
           </a:p>
@@ -10445,13 +10335,13 @@
       </p:sp>
       <p:sp>
         <p:nvSpPr>
-          <p:cNvPr id="30" name="Shape 28"/>
+          <p:cNvPr id="33" name="Shape 31"/>
           <p:cNvSpPr/>
           <p:nvPr/>
         </p:nvSpPr>
         <p:spPr>
           <a:xfrm rot="2700000">
-            <a:off x="7854696" y="4614367"/>
+            <a:off x="7854696" y="4266895"/>
             <a:ext cx="100584" cy="100584"/>
           </a:xfrm>
           <a:prstGeom prst="rect">
@@ -10470,13 +10360,13 @@
       </p:sp>
       <p:sp>
         <p:nvSpPr>
-          <p:cNvPr id="31" name="Text 29"/>
-          <p:cNvSpPr/>
-          <p:nvPr/>
-        </p:nvSpPr>
-        <p:spPr>
-          <a:xfrm>
-            <a:off x="8165592" y="4559503"/>
+          <p:cNvPr id="34" name="Text 32"/>
+          <p:cNvSpPr/>
+          <p:nvPr/>
+        </p:nvSpPr>
+        <p:spPr>
+          <a:xfrm>
+            <a:off x="8165592" y="4212031"/>
             <a:ext cx="3218688" cy="315468"/>
           </a:xfrm>
           <a:prstGeom prst="rect">
@@ -10501,7 +10391,7 @@
                 <a:ea typeface="Arial" pitchFamily="34" charset="-122"/>
                 <a:cs typeface="Arial" pitchFamily="34" charset="-120"/>
               </a:rPr>
-              <a:t>Your voice, in 3 words</a:t>
+              <a:t>4 · Your voice, in 3 words</a:t>
             </a:r>
             <a:endParaRPr lang="en-US" sz="1400" dirty="0"/>
           </a:p>
@@ -10509,13 +10399,13 @@
       </p:sp>
       <p:sp>
         <p:nvSpPr>
-          <p:cNvPr id="32" name="Text 30"/>
-          <p:cNvSpPr/>
-          <p:nvPr/>
-        </p:nvSpPr>
-        <p:spPr>
-          <a:xfrm>
-            <a:off x="8165592" y="4874971"/>
+          <p:cNvPr id="35" name="Text 33"/>
+          <p:cNvSpPr/>
+          <p:nvPr/>
+        </p:nvSpPr>
+        <p:spPr>
+          <a:xfrm>
+            <a:off x="8165592" y="4527499"/>
             <a:ext cx="3218688" cy="283464"/>
           </a:xfrm>
           <a:prstGeom prst="rect">
@@ -10541,6 +10431,109 @@
                 <a:cs typeface="Arial" pitchFamily="34" charset="-120"/>
               </a:rPr>
               <a:t>warm, brief, decisive is a fine start</a:t>
+            </a:r>
+            <a:endParaRPr lang="en-US" sz="1200" dirty="0"/>
+          </a:p>
+        </p:txBody>
+      </p:sp>
+      <p:sp>
+        <p:nvSpPr>
+          <p:cNvPr id="36" name="Shape 34"/>
+          <p:cNvSpPr/>
+          <p:nvPr/>
+        </p:nvSpPr>
+        <p:spPr>
+          <a:xfrm rot="2700000">
+            <a:off x="7854696" y="4957267"/>
+            <a:ext cx="100584" cy="100584"/>
+          </a:xfrm>
+          <a:prstGeom prst="rect">
+            <a:avLst/>
+          </a:prstGeom>
+          <a:solidFill>
+            <a:srgbClr val="C9A227"/>
+          </a:solidFill>
+          <a:ln w="3175">
+            <a:solidFill>
+              <a:srgbClr val="C9A227"/>
+            </a:solidFill>
+            <a:prstDash val="solid"/>
+          </a:ln>
+        </p:spPr>
+      </p:sp>
+      <p:sp>
+        <p:nvSpPr>
+          <p:cNvPr id="37" name="Text 35"/>
+          <p:cNvSpPr/>
+          <p:nvPr/>
+        </p:nvSpPr>
+        <p:spPr>
+          <a:xfrm>
+            <a:off x="8165592" y="4902403"/>
+            <a:ext cx="3218688" cy="315468"/>
+          </a:xfrm>
+          <a:prstGeom prst="rect">
+            <a:avLst/>
+          </a:prstGeom>
+          <a:noFill/>
+          <a:ln/>
+        </p:spPr>
+        <p:txBody>
+          <a:bodyPr wrap="square" lIns="0" tIns="0" rIns="0" bIns="0" rtlCol="0" anchor="t"/>
+          <a:lstStyle/>
+          <a:p>
+            <a:pPr indent="0" marL="0">
+              <a:buNone/>
+            </a:pPr>
+            <a:r>
+              <a:rPr lang="en-US" sz="1400" b="1" dirty="0">
+                <a:solidFill>
+                  <a:srgbClr val="14213D"/>
+                </a:solidFill>
+                <a:latin typeface="Arial" pitchFamily="34" charset="0"/>
+                <a:ea typeface="Arial" pitchFamily="34" charset="-122"/>
+                <a:cs typeface="Arial" pitchFamily="34" charset="-120"/>
+              </a:rPr>
+              <a:t>5 · THE FINAL QUESTION</a:t>
+            </a:r>
+            <a:endParaRPr lang="en-US" sz="1400" dirty="0"/>
+          </a:p>
+        </p:txBody>
+      </p:sp>
+      <p:sp>
+        <p:nvSpPr>
+          <p:cNvPr id="38" name="Text 36"/>
+          <p:cNvSpPr/>
+          <p:nvPr/>
+        </p:nvSpPr>
+        <p:spPr>
+          <a:xfrm>
+            <a:off x="8165592" y="5217871"/>
+            <a:ext cx="3218688" cy="283464"/>
+          </a:xfrm>
+          <a:prstGeom prst="rect">
+            <a:avLst/>
+          </a:prstGeom>
+          <a:noFill/>
+          <a:ln/>
+        </p:spPr>
+        <p:txBody>
+          <a:bodyPr wrap="square" lIns="0" tIns="0" rIns="0" bIns="0" rtlCol="0" anchor="t"/>
+          <a:lstStyle/>
+          <a:p>
+            <a:pPr indent="0" marL="0">
+              <a:buNone/>
+            </a:pPr>
+            <a:r>
+              <a:rPr lang="en-US" sz="1200" i="1" dirty="0">
+                <a:solidFill>
+                  <a:srgbClr val="5A6379"/>
+                </a:solidFill>
+                <a:latin typeface="Arial" pitchFamily="34" charset="0"/>
+                <a:ea typeface="Arial" pitchFamily="34" charset="-122"/>
+                <a:cs typeface="Arial" pitchFamily="34" charset="-120"/>
+              </a:rPr>
+              <a:t>your blind spot, made a standing rule</a:t>
             </a:r>
             <a:endParaRPr lang="en-US" sz="1200" dirty="0"/>
           </a:p>
@@ -12237,7 +12230,7 @@
         <p:spPr>
           <a:xfrm>
             <a:off x="813816" y="1775155"/>
-            <a:ext cx="6675120" cy="1613916"/>
+            <a:ext cx="6675120" cy="1801368"/>
           </a:xfrm>
           <a:prstGeom prst="rect">
             <a:avLst/>
@@ -12281,7 +12274,7 @@
                 <a:ea typeface="Arial" pitchFamily="34" charset="-122"/>
                 <a:cs typeface="Arial" pitchFamily="34" charset="-120"/>
               </a:rPr>
-              <a:t>PASTE INSIDE YOUR DONNA PROJECT</a:t>
+              <a:t>PASTE INTO THE SAME CHAT, AFTER YOUR FIRST TABLE</a:t>
             </a:r>
             <a:endParaRPr lang="en-US" sz="1100" dirty="0"/>
           </a:p>
@@ -12296,7 +12289,7 @@
         <p:spPr>
           <a:xfrm>
             <a:off x="1069848" y="2232355"/>
-            <a:ext cx="6163056" cy="1065276"/>
+            <a:ext cx="6163056" cy="1252728"/>
           </a:xfrm>
           <a:prstGeom prst="rect">
             <a:avLst/>
@@ -12323,7 +12316,7 @@
                 <a:ea typeface="Courier New" pitchFamily="34" charset="-122"/>
                 <a:cs typeface="Courier New" pitchFamily="34" charset="-120"/>
               </a:rPr>
-              <a:t>Turn this project's triage instructions into a reusable skill file</a:t>
+              <a:t>Turn this conversation's triage setup into a reusable skill file</a:t>
             </a:r>
             <a:endParaRPr lang="en-US" sz="1200" dirty="0"/>
           </a:p>
@@ -12343,7 +12336,7 @@
                 <a:ea typeface="Courier New" pitchFamily="34" charset="-122"/>
                 <a:cs typeface="Courier New" pitchFamily="34" charset="-120"/>
               </a:rPr>
-              <a:t>called donna-replies. Use everything you already know from this</a:t>
+              <a:t>named donna-triage. Fill in the template with everything you</a:t>
             </a:r>
             <a:endParaRPr lang="en-US" sz="1200" dirty="0"/>
           </a:p>
@@ -12363,7 +12356,7 @@
                 <a:ea typeface="Courier New" pitchFamily="34" charset="-122"/>
                 <a:cs typeface="Courier New" pitchFamily="34" charset="-120"/>
               </a:rPr>
-              <a:t>project: my VIPs, my delegates, my voice, my rules. Include the</a:t>
+              <a:t>learned: my executive type, my tiers, my voice, my final-question</a:t>
             </a:r>
             <a:endParaRPr lang="en-US" sz="1200" dirty="0"/>
           </a:p>
@@ -12383,7 +12376,7 @@
                 <a:ea typeface="Courier New" pitchFamily="34" charset="-122"/>
                 <a:cs typeface="Courier New" pitchFamily="34" charset="-120"/>
               </a:rPr>
-              <a:t>line "Never send. Never delete. No exceptions." Then give me the</a:t>
+              <a:t>guardrail. Keep the Setup Interview and scheduled-task sections.</a:t>
             </a:r>
             <a:endParaRPr lang="en-US" sz="1200" dirty="0"/>
           </a:p>
@@ -12403,7 +12396,27 @@
                 <a:ea typeface="Courier New" pitchFamily="34" charset="-122"/>
                 <a:cs typeface="Courier New" pitchFamily="34" charset="-120"/>
               </a:rPr>
-              <a:t>finished SKILL.md as a file I can download.</a:t>
+              <a:t>Include the line "Never send. Never delete. No exceptions." Then</a:t>
+            </a:r>
+            <a:endParaRPr lang="en-US" sz="1200" dirty="0"/>
+          </a:p>
+          <a:p>
+            <a:pPr indent="0" marL="0">
+              <a:lnSpc>
+                <a:spcPts val="1480"/>
+              </a:lnSpc>
+              <a:buNone/>
+            </a:pPr>
+            <a:r>
+              <a:rPr lang="en-US" sz="1200" dirty="0">
+                <a:solidFill>
+                  <a:srgbClr val="F7F3EA"/>
+                </a:solidFill>
+                <a:latin typeface="Courier New" pitchFamily="34" charset="0"/>
+                <a:ea typeface="Courier New" pitchFamily="34" charset="-122"/>
+                <a:cs typeface="Courier New" pitchFamily="34" charset="-120"/>
+              </a:rPr>
+              <a:t>give me the finished SKILL.md as a file I can download.</a:t>
             </a:r>
             <a:endParaRPr lang="en-US" sz="1200" dirty="0"/>
           </a:p>
@@ -12772,7 +12785,7 @@
                 <a:ea typeface="Arial" pitchFamily="34" charset="-122"/>
                 <a:cs typeface="Arial" pitchFamily="34" charset="-120"/>
               </a:rPr>
-              <a:t>You should see donna-replies in your Cowork skills list before anyone touches scheduled tasks.</a:t>
+              <a:t>You should see donna-triage in your Cowork skills list before anyone touches scheduled tasks.</a:t>
             </a:r>
             <a:endParaRPr lang="en-US" sz="1300" dirty="0"/>
           </a:p>
@@ -15112,7 +15125,7 @@
         <p:spPr>
           <a:xfrm>
             <a:off x="813816" y="1775155"/>
-            <a:ext cx="6675120" cy="3300984"/>
+            <a:ext cx="6675120" cy="2926080"/>
           </a:xfrm>
           <a:prstGeom prst="rect">
             <a:avLst/>
@@ -15171,7 +15184,7 @@
         <p:spPr>
           <a:xfrm>
             <a:off x="1069848" y="2232355"/>
-            <a:ext cx="6163056" cy="2752344"/>
+            <a:ext cx="6163056" cy="2377440"/>
           </a:xfrm>
           <a:prstGeom prst="rect">
             <a:avLst/>
@@ -15198,7 +15211,7 @@
                 <a:ea typeface="Courier New" pitchFamily="34" charset="-122"/>
                 <a:cs typeface="Courier New" pitchFamily="34" charset="-120"/>
               </a:rPr>
-              <a:t>Every weekday at 4:30 PM, use my donna-replies skill:</a:t>
+              <a:t>Every weekday at 4:30 PM, use my donna-triage skill:</a:t>
             </a:r>
             <a:endParaRPr lang="en-US" sz="1200" dirty="0"/>
           </a:p>
@@ -15218,7 +15231,7 @@
                 <a:ea typeface="Courier New" pitchFamily="34" charset="-122"/>
                 <a:cs typeface="Courier New" pitchFamily="34" charset="-120"/>
               </a:rPr>
-              <a:t>1. Triage today's inbox; save red replies and yellow</a:t>
+              <a:t>1. Triage today's inbox. Save the Reply-Now drafts</a:t>
             </a:r>
             <a:endParaRPr lang="en-US" sz="1200" dirty="0"/>
           </a:p>
@@ -15238,7 +15251,7 @@
                 <a:ea typeface="Courier New" pitchFamily="34" charset="-122"/>
                 <a:cs typeface="Courier New" pitchFamily="34" charset="-120"/>
               </a:rPr>
-              <a:t>   handoffs to my Drafts.</a:t>
+              <a:t>   to my email Drafts.</a:t>
             </a:r>
             <a:endParaRPr lang="en-US" sz="1200" dirty="0"/>
           </a:p>
@@ -15258,7 +15271,7 @@
                 <a:ea typeface="Courier New" pitchFamily="34" charset="-122"/>
                 <a:cs typeface="Courier New" pitchFamily="34" charset="-120"/>
               </a:rPr>
-              <a:t>2. Write my Daily Briefing doc, "Daily Briefing:</a:t>
+              <a:t>2. Create a calendar event today, 4:55-5:00 PM,</a:t>
             </a:r>
             <a:endParaRPr lang="en-US" sz="1200" dirty="0"/>
           </a:p>
@@ -15278,7 +15291,7 @@
                 <a:ea typeface="Courier New" pitchFamily="34" charset="-122"/>
                 <a:cs typeface="Courier New" pitchFamily="34" charset="-120"/>
               </a:rPr>
-              <a:t>   [today’s date]":</a:t>
+              <a:t>   titled "Inbox Triage: Donna".</a:t>
             </a:r>
             <a:endParaRPr lang="en-US" sz="1200" dirty="0"/>
           </a:p>
@@ -15298,7 +15311,7 @@
                 <a:ea typeface="Courier New" pitchFamily="34" charset="-122"/>
                 <a:cs typeface="Courier New" pitchFamily="34" charset="-120"/>
               </a:rPr>
-              <a:t>   . the 5 things that need ME</a:t>
+              <a:t>3. Write the whole triage report INTO the event</a:t>
             </a:r>
             <a:endParaRPr lang="en-US" sz="1200" dirty="0"/>
           </a:p>
@@ -15318,7 +15331,7 @@
                 <a:ea typeface="Courier New" pitchFamily="34" charset="-122"/>
                 <a:cs typeface="Courier New" pitchFamily="34" charset="-120"/>
               </a:rPr>
-              <a:t>   . the replies you drafted</a:t>
+              <a:t>   description. Short lines, one per thread:</a:t>
             </a:r>
             <a:endParaRPr lang="en-US" sz="1200" dirty="0"/>
           </a:p>
@@ -15338,7 +15351,7 @@
                 <a:ea typeface="Courier New" pitchFamily="34" charset="-122"/>
                 <a:cs typeface="Courier New" pitchFamily="34" charset="-120"/>
               </a:rPr>
-              <a:t>   . what you ignored and why</a:t>
+              <a:t>   sender, subject, next move. No tables.</a:t>
             </a:r>
             <a:endParaRPr lang="en-US" sz="1200" dirty="0"/>
           </a:p>
@@ -15358,7 +15371,7 @@
                 <a:ea typeface="Courier New" pitchFamily="34" charset="-122"/>
                 <a:cs typeface="Courier New" pitchFamily="34" charset="-120"/>
               </a:rPr>
-              <a:t>   . my first meeting tomorrow</a:t>
+              <a:t>4. Set an EMAIL reminder on the event, 1 minute</a:t>
             </a:r>
             <a:endParaRPr lang="en-US" sz="1200" dirty="0"/>
           </a:p>
@@ -15378,7 +15391,7 @@
                 <a:ea typeface="Courier New" pitchFamily="34" charset="-122"/>
                 <a:cs typeface="Courier New" pitchFamily="34" charset="-120"/>
               </a:rPr>
-              <a:t>3. Save it to my Drive in a folder "Donna Briefings".</a:t>
+              <a:t>   before.</a:t>
             </a:r>
             <a:endParaRPr lang="en-US" sz="1200" dirty="0"/>
           </a:p>
@@ -15398,7 +15411,7 @@
                 <a:ea typeface="Courier New" pitchFamily="34" charset="-122"/>
                 <a:cs typeface="Courier New" pitchFamily="34" charset="-120"/>
               </a:rPr>
-              <a:t>4. Create a calendar event today 4:55-5:00 PM,</a:t>
+              <a:t>Also: dry run RIGHT NOW. Make today's event start</a:t>
             </a:r>
             <a:endParaRPr lang="en-US" sz="1200" dirty="0"/>
           </a:p>
@@ -15418,47 +15431,7 @@
                 <a:ea typeface="Courier New" pitchFamily="34" charset="-122"/>
                 <a:cs typeface="Courier New" pitchFamily="34" charset="-120"/>
               </a:rPr>
-              <a:t>   "Briefing with Donna", doc link in the description,</a:t>
-            </a:r>
-            <a:endParaRPr lang="en-US" sz="1200" dirty="0"/>
-          </a:p>
-          <a:p>
-            <a:pPr indent="0" marL="0">
-              <a:lnSpc>
-                <a:spcPts val="1480"/>
-              </a:lnSpc>
-              <a:buNone/>
-            </a:pPr>
-            <a:r>
-              <a:rPr lang="en-US" sz="1200" dirty="0">
-                <a:solidFill>
-                  <a:srgbClr val="F7F3EA"/>
-                </a:solidFill>
-                <a:latin typeface="Courier New" pitchFamily="34" charset="0"/>
-                <a:ea typeface="Courier New" pitchFamily="34" charset="-122"/>
-                <a:cs typeface="Courier New" pitchFamily="34" charset="-120"/>
-              </a:rPr>
-              <a:t>   reminder 1 minute before.</a:t>
-            </a:r>
-            <a:endParaRPr lang="en-US" sz="1200" dirty="0"/>
-          </a:p>
-          <a:p>
-            <a:pPr indent="0" marL="0">
-              <a:lnSpc>
-                <a:spcPts val="1480"/>
-              </a:lnSpc>
-              <a:buNone/>
-            </a:pPr>
-            <a:r>
-              <a:rPr lang="en-US" sz="1200" dirty="0">
-                <a:solidFill>
-                  <a:srgbClr val="F7F3EA"/>
-                </a:solidFill>
-                <a:latin typeface="Courier New" pitchFamily="34" charset="0"/>
-                <a:ea typeface="Courier New" pitchFamily="34" charset="-122"/>
-                <a:cs typeface="Courier New" pitchFamily="34" charset="-120"/>
-              </a:rPr>
-              <a:t>Also: do a dry run for today RIGHT NOW.</a:t>
+              <a:t>10 minutes from now, so I watch the email arrive.</a:t>
             </a:r>
             <a:endParaRPr lang="en-US" sz="1200" dirty="0"/>
           </a:p>
@@ -15614,7 +15587,7 @@
                 <a:ea typeface="Arial" pitchFamily="34" charset="-122"/>
                 <a:cs typeface="Arial" pitchFamily="34" charset="-120"/>
               </a:rPr>
-              <a:t>you are notified</a:t>
+              <a:t>the email lands</a:t>
             </a:r>
             <a:endParaRPr lang="en-US" sz="1300" dirty="0"/>
           </a:p>
@@ -15692,7 +15665,7 @@
                 <a:ea typeface="Arial" pitchFamily="34" charset="-122"/>
                 <a:cs typeface="Arial" pitchFamily="34" charset="-120"/>
               </a:rPr>
-              <a:t>a five-minute read</a:t>
+              <a:t>one read, whole inbox</a:t>
             </a:r>
             <a:endParaRPr lang="en-US" sz="1300" dirty="0"/>
           </a:p>
@@ -16424,7 +16397,7 @@
                 <a:ea typeface="Georgia" pitchFamily="34" charset="-122"/>
                 <a:cs typeface="Georgia" pitchFamily="34" charset="-120"/>
               </a:rPr>
-              <a:t>Her first briefing arrives before you leave the room.</a:t>
+              <a:t>Her first triage arrives before you leave the room.</a:t>
             </a:r>
             <a:endParaRPr lang="en-US" sz="3200" dirty="0"/>
           </a:p>
@@ -16466,7 +16439,7 @@
                 <a:ea typeface="Arial" pitchFamily="34" charset="-122"/>
                 <a:cs typeface="Arial" pitchFamily="34" charset="-120"/>
               </a:rPr>
-              <a:t>The trick: Claude never emails you. Your calendar does. The briefing lands from a sender you already trust.</a:t>
+              <a:t>The trick: Claude never emails you. Your calendar does. The triage lands from a sender you already trust.</a:t>
             </a:r>
             <a:endParaRPr lang="en-US" sz="1500" dirty="0"/>
           </a:p>
